--- a/PrezentarePCD.pptx
+++ b/PrezentarePCD.pptx
@@ -5,7 +5,7 @@
     <p:sldMasterId id="2147483659" r:id="rId1"/>
   </p:sldMasterIdLst>
   <p:notesMasterIdLst>
-    <p:notesMasterId r:id="rId13"/>
+    <p:notesMasterId r:id="rId14"/>
   </p:notesMasterIdLst>
   <p:sldIdLst>
     <p:sldId id="256" r:id="rId2"/>
@@ -18,31 +18,32 @@
     <p:sldId id="262" r:id="rId9"/>
     <p:sldId id="264" r:id="rId10"/>
     <p:sldId id="265" r:id="rId11"/>
-    <p:sldId id="267" r:id="rId12"/>
+    <p:sldId id="268" r:id="rId12"/>
+    <p:sldId id="267" r:id="rId13"/>
   </p:sldIdLst>
   <p:sldSz cx="18288000" cy="10287000"/>
   <p:notesSz cx="6858000" cy="9144000"/>
   <p:embeddedFontLst>
     <p:embeddedFont>
       <p:font typeface="Inclusive Sans" panose="020B0604020202020204" charset="0"/>
-      <p:regular r:id="rId14"/>
-      <p:bold r:id="rId15"/>
-      <p:italic r:id="rId16"/>
-      <p:boldItalic r:id="rId17"/>
+      <p:regular r:id="rId15"/>
+      <p:bold r:id="rId16"/>
+      <p:italic r:id="rId17"/>
+      <p:boldItalic r:id="rId18"/>
     </p:embeddedFont>
     <p:embeddedFont>
-      <p:font typeface="Merriweather Sans" pitchFamily="2" charset="-18"/>
-      <p:regular r:id="rId18"/>
-      <p:bold r:id="rId19"/>
-      <p:italic r:id="rId20"/>
-      <p:boldItalic r:id="rId21"/>
+      <p:font typeface="Merriweather Sans" pitchFamily="2" charset="0"/>
+      <p:regular r:id="rId19"/>
+      <p:bold r:id="rId20"/>
+      <p:italic r:id="rId21"/>
+      <p:boldItalic r:id="rId22"/>
     </p:embeddedFont>
     <p:embeddedFont>
-      <p:font typeface="Merriweather Sans Light" pitchFamily="2" charset="-18"/>
-      <p:regular r:id="rId22"/>
-      <p:bold r:id="rId23"/>
-      <p:italic r:id="rId24"/>
-      <p:boldItalic r:id="rId25"/>
+      <p:font typeface="Merriweather Sans Light" pitchFamily="2" charset="0"/>
+      <p:regular r:id="rId23"/>
+      <p:bold r:id="rId24"/>
+      <p:italic r:id="rId25"/>
+      <p:boldItalic r:id="rId26"/>
     </p:embeddedFont>
   </p:embeddedFontLst>
   <p:defaultTextStyle>
@@ -11041,7 +11042,7 @@
         </p:nvGrpSpPr>
         <p:grpSpPr>
           <a:xfrm>
-            <a:off x="1346419" y="2660154"/>
+            <a:off x="2848647" y="2660154"/>
             <a:ext cx="6608045" cy="6806522"/>
             <a:chOff x="0" y="-19050"/>
             <a:chExt cx="1740390" cy="1792664"/>
@@ -11248,7 +11249,7 @@
                 <a:cs typeface="Merriweather Sans Light"/>
                 <a:sym typeface="Merriweather Sans Light"/>
               </a:rPr>
-              <a:t>Oprirea</a:t>
+              <a:t>Panoul</a:t>
             </a:r>
             <a:r>
               <a:rPr lang="en-US" sz="6399" b="0" i="0" u="none" strike="noStrike" cap="none" dirty="0">
@@ -11272,7 +11273,7 @@
                 <a:cs typeface="Merriweather Sans Light"/>
                 <a:sym typeface="Merriweather Sans Light"/>
               </a:rPr>
-              <a:t>Sincronă</a:t>
+              <a:t>Administratorului</a:t>
             </a:r>
             <a:endParaRPr lang="en-US" dirty="0"/>
           </a:p>
@@ -11286,8 +11287,8 @@
         </p:nvSpPr>
         <p:spPr>
           <a:xfrm>
-            <a:off x="1926291" y="3496558"/>
-            <a:ext cx="5448300" cy="5133713"/>
+            <a:off x="3297890" y="3532723"/>
+            <a:ext cx="5448300" cy="3988784"/>
           </a:xfrm>
           <a:prstGeom prst="rect">
             <a:avLst/>
@@ -11329,7 +11330,7 @@
                 <a:cs typeface="Inclusive Sans"/>
                 <a:sym typeface="Inclusive Sans"/>
               </a:rPr>
-              <a:t>Administratorul</a:t>
+              <a:t>Adminul</a:t>
             </a:r>
             <a:r>
               <a:rPr lang="en-US" sz="2400" b="1" i="0" u="none" strike="noStrike" cap="none" dirty="0">
@@ -11353,7 +11354,7 @@
                 <a:cs typeface="Inclusive Sans"/>
                 <a:sym typeface="Inclusive Sans"/>
               </a:rPr>
-              <a:t>trimite</a:t>
+              <a:t>foloseste</a:t>
             </a:r>
             <a:r>
               <a:rPr lang="en-US" sz="2400" b="1" i="0" u="none" strike="noStrike" cap="none" dirty="0">
@@ -11365,7 +11366,7 @@
                 <a:cs typeface="Inclusive Sans"/>
                 <a:sym typeface="Inclusive Sans"/>
               </a:rPr>
-              <a:t> </a:t>
+              <a:t> un Socket UNIX </a:t>
             </a:r>
             <a:r>
               <a:rPr lang="en-US" sz="2400" b="1" i="0" u="none" strike="noStrike" cap="none" dirty="0" err="1">
@@ -11377,7 +11378,7 @@
                 <a:cs typeface="Inclusive Sans"/>
                 <a:sym typeface="Inclusive Sans"/>
               </a:rPr>
-              <a:t>comanda</a:t>
+              <a:t>pentru</a:t>
             </a:r>
             <a:r>
               <a:rPr lang="en-US" sz="2400" b="1" i="0" u="none" strike="noStrike" cap="none" dirty="0">
@@ -11389,55 +11390,7 @@
                 <a:cs typeface="Inclusive Sans"/>
                 <a:sym typeface="Inclusive Sans"/>
               </a:rPr>
-              <a:t> 0 </a:t>
-            </a:r>
-            <a:r>
-              <a:rPr lang="en-US" sz="2400" b="1" i="0" u="none" strike="noStrike" cap="none" dirty="0" err="1">
-                <a:solidFill>
-                  <a:srgbClr val="F9F6FF"/>
-                </a:solidFill>
-                <a:latin typeface="Inclusive Sans"/>
-                <a:ea typeface="Inclusive Sans"/>
-                <a:cs typeface="Inclusive Sans"/>
-                <a:sym typeface="Inclusive Sans"/>
-              </a:rPr>
-              <a:t>prin</a:t>
-            </a:r>
-            <a:r>
-              <a:rPr lang="en-US" sz="2400" b="1" i="0" u="none" strike="noStrike" cap="none" dirty="0">
-                <a:solidFill>
-                  <a:srgbClr val="F9F6FF"/>
-                </a:solidFill>
-                <a:latin typeface="Inclusive Sans"/>
-                <a:ea typeface="Inclusive Sans"/>
-                <a:cs typeface="Inclusive Sans"/>
-                <a:sym typeface="Inclusive Sans"/>
-              </a:rPr>
-              <a:t> socket-</a:t>
-            </a:r>
-            <a:r>
-              <a:rPr lang="en-US" sz="2400" b="1" i="0" u="none" strike="noStrike" cap="none" dirty="0" err="1">
-                <a:solidFill>
-                  <a:srgbClr val="F9F6FF"/>
-                </a:solidFill>
-                <a:latin typeface="Inclusive Sans"/>
-                <a:ea typeface="Inclusive Sans"/>
-                <a:cs typeface="Inclusive Sans"/>
-                <a:sym typeface="Inclusive Sans"/>
-              </a:rPr>
-              <a:t>ul</a:t>
-            </a:r>
-            <a:r>
-              <a:rPr lang="en-US" sz="2400" b="1" i="0" u="none" strike="noStrike" cap="none" dirty="0">
-                <a:solidFill>
-                  <a:srgbClr val="F9F6FF"/>
-                </a:solidFill>
-                <a:latin typeface="Inclusive Sans"/>
-                <a:ea typeface="Inclusive Sans"/>
-                <a:cs typeface="Inclusive Sans"/>
-                <a:sym typeface="Inclusive Sans"/>
-              </a:rPr>
-              <a:t> local</a:t>
+              <a:t> Securitate</a:t>
             </a:r>
           </a:p>
           <a:p>
@@ -11457,6 +11410,129 @@
               <a:buFont typeface="Wingdings" panose="05000000000000000000" pitchFamily="2" charset="2"/>
               <a:buChar char="Ø"/>
             </a:pPr>
+            <a:endParaRPr lang="en-US" sz="2400" b="1" i="0" u="none" strike="noStrike" cap="none" dirty="0">
+              <a:solidFill>
+                <a:srgbClr val="F9F6FF"/>
+              </a:solidFill>
+              <a:latin typeface="Inclusive Sans"/>
+              <a:ea typeface="Inclusive Sans"/>
+              <a:cs typeface="Inclusive Sans"/>
+              <a:sym typeface="Inclusive Sans"/>
+            </a:endParaRPr>
+          </a:p>
+          <a:p>
+            <a:pPr marL="342900" marR="0" lvl="0" indent="-342900" algn="l" rtl="0">
+              <a:lnSpc>
+                <a:spcPct val="119958"/>
+              </a:lnSpc>
+              <a:spcBef>
+                <a:spcPts val="0"/>
+              </a:spcBef>
+              <a:spcAft>
+                <a:spcPts val="0"/>
+              </a:spcAft>
+              <a:buClr>
+                <a:schemeClr val="bg1"/>
+              </a:buClr>
+              <a:buFont typeface="Wingdings" panose="05000000000000000000" pitchFamily="2" charset="2"/>
+              <a:buChar char="Ø"/>
+            </a:pPr>
+            <a:r>
+              <a:rPr lang="en-US" sz="2400" b="1" dirty="0">
+                <a:solidFill>
+                  <a:srgbClr val="F9F6FF"/>
+                </a:solidFill>
+                <a:latin typeface="Inclusive Sans"/>
+                <a:ea typeface="Inclusive Sans"/>
+                <a:cs typeface="Inclusive Sans"/>
+                <a:sym typeface="Inclusive Sans"/>
+              </a:rPr>
+              <a:t>Control 1:1 </a:t>
+            </a:r>
+            <a:r>
+              <a:rPr lang="en-US" sz="2400" b="1" dirty="0" err="1">
+                <a:solidFill>
+                  <a:srgbClr val="F9F6FF"/>
+                </a:solidFill>
+                <a:latin typeface="Inclusive Sans"/>
+                <a:ea typeface="Inclusive Sans"/>
+                <a:cs typeface="Inclusive Sans"/>
+                <a:sym typeface="Inclusive Sans"/>
+              </a:rPr>
+              <a:t>pentru</a:t>
+            </a:r>
+            <a:r>
+              <a:rPr lang="en-US" sz="2400" b="1" dirty="0">
+                <a:solidFill>
+                  <a:srgbClr val="F9F6FF"/>
+                </a:solidFill>
+                <a:latin typeface="Inclusive Sans"/>
+                <a:ea typeface="Inclusive Sans"/>
+                <a:cs typeface="Inclusive Sans"/>
+                <a:sym typeface="Inclusive Sans"/>
+              </a:rPr>
+              <a:t> a </a:t>
+            </a:r>
+            <a:r>
+              <a:rPr lang="en-US" sz="2400" b="1" dirty="0" err="1">
+                <a:solidFill>
+                  <a:srgbClr val="F9F6FF"/>
+                </a:solidFill>
+                <a:latin typeface="Inclusive Sans"/>
+                <a:ea typeface="Inclusive Sans"/>
+                <a:cs typeface="Inclusive Sans"/>
+                <a:sym typeface="Inclusive Sans"/>
+              </a:rPr>
+              <a:t>avea</a:t>
+            </a:r>
+            <a:r>
+              <a:rPr lang="en-US" sz="2400" b="1" dirty="0">
+                <a:solidFill>
+                  <a:srgbClr val="F9F6FF"/>
+                </a:solidFill>
+                <a:latin typeface="Inclusive Sans"/>
+                <a:ea typeface="Inclusive Sans"/>
+                <a:cs typeface="Inclusive Sans"/>
+                <a:sym typeface="Inclusive Sans"/>
+              </a:rPr>
+              <a:t> </a:t>
+            </a:r>
+            <a:r>
+              <a:rPr lang="en-US" sz="2400" b="1" dirty="0" err="1">
+                <a:solidFill>
+                  <a:srgbClr val="F9F6FF"/>
+                </a:solidFill>
+                <a:latin typeface="Inclusive Sans"/>
+                <a:ea typeface="Inclusive Sans"/>
+                <a:cs typeface="Inclusive Sans"/>
+                <a:sym typeface="Inclusive Sans"/>
+              </a:rPr>
+              <a:t>doar</a:t>
+            </a:r>
+            <a:r>
+              <a:rPr lang="en-US" sz="2400" b="1" dirty="0">
+                <a:solidFill>
+                  <a:srgbClr val="F9F6FF"/>
+                </a:solidFill>
+                <a:latin typeface="Inclusive Sans"/>
+                <a:ea typeface="Inclusive Sans"/>
+                <a:cs typeface="Inclusive Sans"/>
+                <a:sym typeface="Inclusive Sans"/>
+              </a:rPr>
+              <a:t> un admin active in acelasi </a:t>
+            </a:r>
+            <a:r>
+              <a:rPr lang="en-US" sz="2400" b="1" dirty="0" err="1">
+                <a:solidFill>
+                  <a:srgbClr val="F9F6FF"/>
+                </a:solidFill>
+                <a:latin typeface="Inclusive Sans"/>
+                <a:ea typeface="Inclusive Sans"/>
+                <a:cs typeface="Inclusive Sans"/>
+                <a:sym typeface="Inclusive Sans"/>
+              </a:rPr>
+              <a:t>timp</a:t>
+            </a:r>
             <a:endParaRPr lang="en-US" sz="2400" b="1" dirty="0">
               <a:solidFill>
                 <a:srgbClr val="F9F6FF"/>
@@ -11484,109 +11560,7 @@
               <a:buFont typeface="Wingdings" panose="05000000000000000000" pitchFamily="2" charset="2"/>
               <a:buChar char="Ø"/>
             </a:pPr>
-            <a:r>
-              <a:rPr lang="en-US" sz="2400" b="1" i="0" u="none" strike="noStrike" cap="none" dirty="0">
-                <a:solidFill>
-                  <a:srgbClr val="F9F6FF"/>
-                </a:solidFill>
-                <a:latin typeface="Inclusive Sans"/>
-                <a:ea typeface="Inclusive Sans"/>
-                <a:cs typeface="Inclusive Sans"/>
-                <a:sym typeface="Inclusive Sans"/>
-              </a:rPr>
-              <a:t>Admin Thread </a:t>
-            </a:r>
-            <a:r>
-              <a:rPr lang="en-US" sz="2400" b="1" i="0" u="none" strike="noStrike" cap="none" dirty="0" err="1">
-                <a:solidFill>
-                  <a:srgbClr val="F9F6FF"/>
-                </a:solidFill>
-                <a:latin typeface="Inclusive Sans"/>
-                <a:ea typeface="Inclusive Sans"/>
-                <a:cs typeface="Inclusive Sans"/>
-                <a:sym typeface="Inclusive Sans"/>
-              </a:rPr>
-              <a:t>setează</a:t>
-            </a:r>
-            <a:r>
-              <a:rPr lang="en-US" sz="2400" b="1" i="0" u="none" strike="noStrike" cap="none" dirty="0">
-                <a:solidFill>
-                  <a:srgbClr val="F9F6FF"/>
-                </a:solidFill>
-                <a:latin typeface="Inclusive Sans"/>
-                <a:ea typeface="Inclusive Sans"/>
-                <a:cs typeface="Inclusive Sans"/>
-                <a:sym typeface="Inclusive Sans"/>
-              </a:rPr>
-              <a:t> </a:t>
-            </a:r>
-            <a:r>
-              <a:rPr lang="en-US" sz="2400" b="1" i="0" u="none" strike="noStrike" cap="none" dirty="0" err="1">
-                <a:solidFill>
-                  <a:srgbClr val="F9F6FF"/>
-                </a:solidFill>
-                <a:latin typeface="Inclusive Sans"/>
-                <a:ea typeface="Inclusive Sans"/>
-                <a:cs typeface="Inclusive Sans"/>
-                <a:sym typeface="Inclusive Sans"/>
-              </a:rPr>
-              <a:t>fanionul</a:t>
-            </a:r>
-            <a:r>
-              <a:rPr lang="en-US" sz="2400" b="1" i="0" u="none" strike="noStrike" cap="none" dirty="0">
-                <a:solidFill>
-                  <a:srgbClr val="F9F6FF"/>
-                </a:solidFill>
-                <a:latin typeface="Inclusive Sans"/>
-                <a:ea typeface="Inclusive Sans"/>
-                <a:cs typeface="Inclusive Sans"/>
-                <a:sym typeface="Inclusive Sans"/>
-              </a:rPr>
-              <a:t> global </a:t>
-            </a:r>
-            <a:r>
-              <a:rPr lang="en-US" sz="2400" b="1" i="0" u="none" strike="noStrike" cap="none" dirty="0" err="1">
-                <a:solidFill>
-                  <a:srgbClr val="F9F6FF"/>
-                </a:solidFill>
-                <a:latin typeface="Inclusive Sans"/>
-                <a:ea typeface="Inclusive Sans"/>
-                <a:cs typeface="Inclusive Sans"/>
-                <a:sym typeface="Inclusive Sans"/>
-              </a:rPr>
-              <a:t>g_server_running</a:t>
-            </a:r>
-            <a:r>
-              <a:rPr lang="en-US" sz="2400" b="1" i="0" u="none" strike="noStrike" cap="none" dirty="0">
-                <a:solidFill>
-                  <a:srgbClr val="F9F6FF"/>
-                </a:solidFill>
-                <a:latin typeface="Inclusive Sans"/>
-                <a:ea typeface="Inclusive Sans"/>
-                <a:cs typeface="Inclusive Sans"/>
-                <a:sym typeface="Inclusive Sans"/>
-              </a:rPr>
-              <a:t> = 0</a:t>
-            </a:r>
-          </a:p>
-          <a:p>
-            <a:pPr marL="342900" marR="0" lvl="0" indent="-342900" algn="l" rtl="0">
-              <a:lnSpc>
-                <a:spcPct val="119958"/>
-              </a:lnSpc>
-              <a:spcBef>
-                <a:spcPts val="0"/>
-              </a:spcBef>
-              <a:spcAft>
-                <a:spcPts val="0"/>
-              </a:spcAft>
-              <a:buClr>
-                <a:schemeClr val="bg1"/>
-              </a:buClr>
-              <a:buFont typeface="Wingdings" panose="05000000000000000000" pitchFamily="2" charset="2"/>
-              <a:buChar char="Ø"/>
-            </a:pPr>
-            <a:endParaRPr lang="en-US" sz="2400" b="1" dirty="0">
+            <a:endParaRPr lang="en-US" sz="2400" b="1" i="0" u="none" strike="noStrike" cap="none" dirty="0">
               <a:solidFill>
                 <a:srgbClr val="F9F6FF"/>
               </a:solidFill>
@@ -11614,163 +11588,43 @@
               <a:buChar char="Ø"/>
             </a:pPr>
             <a:r>
-              <a:rPr lang="en-US" sz="2400" b="1" i="0" u="none" strike="noStrike" cap="none" dirty="0" err="1">
-                <a:solidFill>
-                  <a:srgbClr val="F9F6FF"/>
-                </a:solidFill>
-                <a:latin typeface="Inclusive Sans"/>
-                <a:ea typeface="Inclusive Sans"/>
-                <a:cs typeface="Inclusive Sans"/>
-                <a:sym typeface="Inclusive Sans"/>
-              </a:rPr>
-              <a:t>Pentru</a:t>
-            </a:r>
-            <a:r>
-              <a:rPr lang="en-US" sz="2400" b="1" i="0" u="none" strike="noStrike" cap="none" dirty="0">
-                <a:solidFill>
-                  <a:srgbClr val="F9F6FF"/>
-                </a:solidFill>
-                <a:latin typeface="Inclusive Sans"/>
-                <a:ea typeface="Inclusive Sans"/>
-                <a:cs typeface="Inclusive Sans"/>
-                <a:sym typeface="Inclusive Sans"/>
-              </a:rPr>
-              <a:t> a nu </a:t>
-            </a:r>
-            <a:r>
-              <a:rPr lang="en-US" sz="2400" b="1" i="0" u="none" strike="noStrike" cap="none" dirty="0" err="1">
-                <a:solidFill>
-                  <a:srgbClr val="F9F6FF"/>
-                </a:solidFill>
-                <a:latin typeface="Inclusive Sans"/>
-                <a:ea typeface="Inclusive Sans"/>
-                <a:cs typeface="Inclusive Sans"/>
-                <a:sym typeface="Inclusive Sans"/>
-              </a:rPr>
-              <a:t>lăsa</a:t>
-            </a:r>
-            <a:r>
-              <a:rPr lang="en-US" sz="2400" b="1" i="0" u="none" strike="noStrike" cap="none" dirty="0">
-                <a:solidFill>
-                  <a:srgbClr val="F9F6FF"/>
-                </a:solidFill>
-                <a:latin typeface="Inclusive Sans"/>
-                <a:ea typeface="Inclusive Sans"/>
-                <a:cs typeface="Inclusive Sans"/>
-                <a:sym typeface="Inclusive Sans"/>
-              </a:rPr>
-              <a:t> fire </a:t>
-            </a:r>
-            <a:r>
-              <a:rPr lang="en-US" sz="2400" b="1" i="0" u="none" strike="noStrike" cap="none" dirty="0" err="1">
-                <a:solidFill>
-                  <a:srgbClr val="F9F6FF"/>
-                </a:solidFill>
-                <a:latin typeface="Inclusive Sans"/>
-                <a:ea typeface="Inclusive Sans"/>
-                <a:cs typeface="Inclusive Sans"/>
-                <a:sym typeface="Inclusive Sans"/>
-              </a:rPr>
-              <a:t>blocate</a:t>
-            </a:r>
-            <a:r>
-              <a:rPr lang="en-US" sz="2400" b="1" i="0" u="none" strike="noStrike" cap="none" dirty="0">
-                <a:solidFill>
-                  <a:srgbClr val="F9F6FF"/>
-                </a:solidFill>
-                <a:latin typeface="Inclusive Sans"/>
-                <a:ea typeface="Inclusive Sans"/>
-                <a:cs typeface="Inclusive Sans"/>
-                <a:sym typeface="Inclusive Sans"/>
-              </a:rPr>
-              <a:t>, Admin Thread </a:t>
-            </a:r>
-            <a:r>
-              <a:rPr lang="en-US" sz="2400" b="1" i="0" u="none" strike="noStrike" cap="none" dirty="0" err="1">
-                <a:solidFill>
-                  <a:srgbClr val="F9F6FF"/>
-                </a:solidFill>
-                <a:latin typeface="Inclusive Sans"/>
-                <a:ea typeface="Inclusive Sans"/>
-                <a:cs typeface="Inclusive Sans"/>
-                <a:sym typeface="Inclusive Sans"/>
-              </a:rPr>
-              <a:t>dă</a:t>
-            </a:r>
-            <a:r>
-              <a:rPr lang="en-US" sz="2400" b="1" i="0" u="none" strike="noStrike" cap="none" dirty="0">
-                <a:solidFill>
-                  <a:srgbClr val="F9F6FF"/>
-                </a:solidFill>
-                <a:latin typeface="Inclusive Sans"/>
-                <a:ea typeface="Inclusive Sans"/>
-                <a:cs typeface="Inclusive Sans"/>
-                <a:sym typeface="Inclusive Sans"/>
-              </a:rPr>
-              <a:t> un </a:t>
-            </a:r>
-            <a:r>
-              <a:rPr lang="en-US" sz="2400" b="1" i="0" u="none" strike="noStrike" cap="none" dirty="0" err="1">
-                <a:solidFill>
-                  <a:srgbClr val="F9F6FF"/>
-                </a:solidFill>
-                <a:latin typeface="Inclusive Sans"/>
-                <a:ea typeface="Inclusive Sans"/>
-                <a:cs typeface="Inclusive Sans"/>
-                <a:sym typeface="Inclusive Sans"/>
-              </a:rPr>
-              <a:t>semnal</a:t>
-            </a:r>
-            <a:r>
-              <a:rPr lang="en-US" sz="2400" b="1" i="0" u="none" strike="noStrike" cap="none" dirty="0">
-                <a:solidFill>
-                  <a:srgbClr val="F9F6FF"/>
-                </a:solidFill>
-                <a:latin typeface="Inclusive Sans"/>
-                <a:ea typeface="Inclusive Sans"/>
-                <a:cs typeface="Inclusive Sans"/>
-                <a:sym typeface="Inclusive Sans"/>
-              </a:rPr>
-              <a:t> `</a:t>
-            </a:r>
-            <a:r>
-              <a:rPr lang="en-US" sz="2400" b="1" i="0" u="none" strike="noStrike" cap="none" dirty="0" err="1">
-                <a:solidFill>
-                  <a:srgbClr val="F9F6FF"/>
-                </a:solidFill>
-                <a:latin typeface="Inclusive Sans"/>
-                <a:ea typeface="Inclusive Sans"/>
-                <a:cs typeface="Inclusive Sans"/>
-                <a:sym typeface="Inclusive Sans"/>
-              </a:rPr>
-              <a:t>pthread_cond_broadcast</a:t>
-            </a:r>
-            <a:r>
-              <a:rPr lang="en-US" sz="2400" b="1" i="0" u="none" strike="noStrike" cap="none" dirty="0">
-                <a:solidFill>
-                  <a:srgbClr val="F9F6FF"/>
-                </a:solidFill>
-                <a:latin typeface="Inclusive Sans"/>
-                <a:ea typeface="Inclusive Sans"/>
-                <a:cs typeface="Inclusive Sans"/>
-                <a:sym typeface="Inclusive Sans"/>
-              </a:rPr>
-              <a:t>` </a:t>
-            </a:r>
-            <a:r>
-              <a:rPr lang="en-US" sz="2400" b="1" i="0" u="none" strike="noStrike" cap="none" dirty="0" err="1">
-                <a:solidFill>
-                  <a:srgbClr val="F9F6FF"/>
-                </a:solidFill>
-                <a:latin typeface="Inclusive Sans"/>
-                <a:ea typeface="Inclusive Sans"/>
-                <a:cs typeface="Inclusive Sans"/>
-                <a:sym typeface="Inclusive Sans"/>
-              </a:rPr>
-              <a:t>în</a:t>
-            </a:r>
-            <a:r>
-              <a:rPr lang="en-US" sz="2400" b="1" i="0" u="none" strike="noStrike" cap="none" dirty="0">
+              <a:rPr lang="en-US" sz="2400" b="1" dirty="0" err="1">
+                <a:solidFill>
+                  <a:srgbClr val="F9F6FF"/>
+                </a:solidFill>
+                <a:latin typeface="Inclusive Sans"/>
+                <a:ea typeface="Inclusive Sans"/>
+                <a:cs typeface="Inclusive Sans"/>
+                <a:sym typeface="Inclusive Sans"/>
+              </a:rPr>
+              <a:t>Mecanism</a:t>
+            </a:r>
+            <a:r>
+              <a:rPr lang="en-US" sz="2400" b="1" dirty="0">
+                <a:solidFill>
+                  <a:srgbClr val="F9F6FF"/>
+                </a:solidFill>
+                <a:latin typeface="Inclusive Sans"/>
+                <a:ea typeface="Inclusive Sans"/>
+                <a:cs typeface="Inclusive Sans"/>
+                <a:sym typeface="Inclusive Sans"/>
+              </a:rPr>
+              <a:t> de Timeout </a:t>
+            </a:r>
+            <a:r>
+              <a:rPr lang="en-US" sz="2400" b="1" dirty="0" err="1">
+                <a:solidFill>
+                  <a:srgbClr val="F9F6FF"/>
+                </a:solidFill>
+                <a:latin typeface="Inclusive Sans"/>
+                <a:ea typeface="Inclusive Sans"/>
+                <a:cs typeface="Inclusive Sans"/>
+                <a:sym typeface="Inclusive Sans"/>
+              </a:rPr>
+              <a:t>daca</a:t>
+            </a:r>
+            <a:r>
+              <a:rPr lang="en-US" sz="2400" b="1" dirty="0">
                 <a:solidFill>
                   <a:srgbClr val="F9F6FF"/>
                 </a:solidFill>
@@ -11782,16 +11636,88 @@
               <a:t> </a:t>
             </a:r>
             <a:r>
-              <a:rPr lang="en-US" sz="2400" b="1" i="0" u="none" strike="noStrike" cap="none" dirty="0" err="1">
-                <a:solidFill>
-                  <a:srgbClr val="F9F6FF"/>
-                </a:solidFill>
-                <a:latin typeface="Inclusive Sans"/>
-                <a:ea typeface="Inclusive Sans"/>
-                <a:cs typeface="Inclusive Sans"/>
-                <a:sym typeface="Inclusive Sans"/>
-              </a:rPr>
-              <a:t>coadă</a:t>
+              <a:rPr lang="en-US" sz="2400" b="1" dirty="0" err="1">
+                <a:solidFill>
+                  <a:srgbClr val="F9F6FF"/>
+                </a:solidFill>
+                <a:latin typeface="Inclusive Sans"/>
+                <a:ea typeface="Inclusive Sans"/>
+                <a:cs typeface="Inclusive Sans"/>
+                <a:sym typeface="Inclusive Sans"/>
+              </a:rPr>
+              <a:t>administratorul</a:t>
+            </a:r>
+            <a:r>
+              <a:rPr lang="en-US" sz="2400" b="1" dirty="0">
+                <a:solidFill>
+                  <a:srgbClr val="F9F6FF"/>
+                </a:solidFill>
+                <a:latin typeface="Inclusive Sans"/>
+                <a:ea typeface="Inclusive Sans"/>
+                <a:cs typeface="Inclusive Sans"/>
+                <a:sym typeface="Inclusive Sans"/>
+              </a:rPr>
+              <a:t> </a:t>
+            </a:r>
+            <a:r>
+              <a:rPr lang="en-US" sz="2400" b="1" dirty="0" err="1">
+                <a:solidFill>
+                  <a:srgbClr val="F9F6FF"/>
+                </a:solidFill>
+                <a:latin typeface="Inclusive Sans"/>
+                <a:ea typeface="Inclusive Sans"/>
+                <a:cs typeface="Inclusive Sans"/>
+                <a:sym typeface="Inclusive Sans"/>
+              </a:rPr>
+              <a:t>este</a:t>
+            </a:r>
+            <a:r>
+              <a:rPr lang="en-US" sz="2400" b="1" dirty="0">
+                <a:solidFill>
+                  <a:srgbClr val="F9F6FF"/>
+                </a:solidFill>
+                <a:latin typeface="Inclusive Sans"/>
+                <a:ea typeface="Inclusive Sans"/>
+                <a:cs typeface="Inclusive Sans"/>
+                <a:sym typeface="Inclusive Sans"/>
+              </a:rPr>
+              <a:t> inactive </a:t>
+            </a:r>
+            <a:r>
+              <a:rPr lang="en-US" sz="2400" b="1" dirty="0" err="1">
+                <a:solidFill>
+                  <a:srgbClr val="F9F6FF"/>
+                </a:solidFill>
+                <a:latin typeface="Inclusive Sans"/>
+                <a:ea typeface="Inclusive Sans"/>
+                <a:cs typeface="Inclusive Sans"/>
+                <a:sym typeface="Inclusive Sans"/>
+              </a:rPr>
+              <a:t>pentru</a:t>
+            </a:r>
+            <a:r>
+              <a:rPr lang="en-US" sz="2400" b="1" dirty="0">
+                <a:solidFill>
+                  <a:srgbClr val="F9F6FF"/>
+                </a:solidFill>
+                <a:latin typeface="Inclusive Sans"/>
+                <a:ea typeface="Inclusive Sans"/>
+                <a:cs typeface="Inclusive Sans"/>
+                <a:sym typeface="Inclusive Sans"/>
+              </a:rPr>
+              <a:t> 30 de </a:t>
+            </a:r>
+            <a:r>
+              <a:rPr lang="en-US" sz="2400" b="1" dirty="0" err="1">
+                <a:solidFill>
+                  <a:srgbClr val="F9F6FF"/>
+                </a:solidFill>
+                <a:latin typeface="Inclusive Sans"/>
+                <a:ea typeface="Inclusive Sans"/>
+                <a:cs typeface="Inclusive Sans"/>
+                <a:sym typeface="Inclusive Sans"/>
+              </a:rPr>
+              <a:t>secunde</a:t>
             </a:r>
             <a:endParaRPr lang="en-US" sz="2400" b="1" i="0" u="none" strike="noStrike" cap="none" dirty="0">
               <a:solidFill>
@@ -11803,6 +11729,38 @@
               <a:sym typeface="Inclusive Sans"/>
             </a:endParaRPr>
           </a:p>
+        </p:txBody>
+      </p:sp>
+      <p:sp>
+        <p:nvSpPr>
+          <p:cNvPr id="5" name="Google Shape;324;p22">
+            <a:extLst>
+              <a:ext uri="{FF2B5EF4-FFF2-40B4-BE49-F238E27FC236}">
+                <a16:creationId xmlns:a16="http://schemas.microsoft.com/office/drawing/2014/main" id="{63A7EC47-76DD-AAA5-359F-85CE50DC67B3}"/>
+              </a:ext>
+            </a:extLst>
+          </p:cNvPr>
+          <p:cNvSpPr txBox="1"/>
+          <p:nvPr/>
+        </p:nvSpPr>
+        <p:spPr>
+          <a:xfrm>
+            <a:off x="10136841" y="3532723"/>
+            <a:ext cx="5448300" cy="701731"/>
+          </a:xfrm>
+          <a:prstGeom prst="rect">
+            <a:avLst/>
+          </a:prstGeom>
+          <a:noFill/>
+          <a:ln>
+            <a:noFill/>
+          </a:ln>
+        </p:spPr>
+        <p:txBody>
+          <a:bodyPr spcFirstLastPara="1" wrap="square" lIns="0" tIns="0" rIns="0" bIns="0" anchor="t" anchorCtr="0">
+            <a:spAutoFit/>
+          </a:bodyPr>
+          <a:lstStyle/>
           <a:p>
             <a:pPr marL="342900" marR="0" lvl="0" indent="-342900" algn="l" rtl="0">
               <a:lnSpc>
@@ -11850,198 +11808,37 @@
           </a:p>
         </p:txBody>
       </p:sp>
-      <p:grpSp>
-        <p:nvGrpSpPr>
-          <p:cNvPr id="2" name="Google Shape;316;p22">
+    </p:spTree>
+  </p:cSld>
+  <p:clrMapOvr>
+    <a:masterClrMapping/>
+  </p:clrMapOvr>
+</p:sld>
+</file>
+
+<file path=ppt/slides/slide11.xml><?xml version="1.0" encoding="utf-8"?>
+<p:sld xmlns:a="http://schemas.openxmlformats.org/drawingml/2006/main" xmlns:r="http://schemas.openxmlformats.org/officeDocument/2006/relationships" xmlns:p="http://schemas.openxmlformats.org/presentationml/2006/main">
+  <p:cSld>
+    <p:spTree>
+      <p:nvGrpSpPr>
+        <p:cNvPr id="1" name=""/>
+        <p:cNvGrpSpPr/>
+        <p:nvPr/>
+      </p:nvGrpSpPr>
+      <p:grpSpPr>
+        <a:xfrm>
+          <a:off x="0" y="0"/>
+          <a:ext cx="0" cy="0"/>
+          <a:chOff x="0" y="0"/>
+          <a:chExt cx="0" cy="0"/>
+        </a:xfrm>
+      </p:grpSpPr>
+      <p:sp>
+        <p:nvSpPr>
+          <p:cNvPr id="4" name="Google Shape;324;p22">
             <a:extLst>
               <a:ext uri="{FF2B5EF4-FFF2-40B4-BE49-F238E27FC236}">
-                <a16:creationId xmlns:a16="http://schemas.microsoft.com/office/drawing/2014/main" id="{20B7584D-FA22-4AF7-910C-8161517C0FD0}"/>
-              </a:ext>
-            </a:extLst>
-          </p:cNvPr>
-          <p:cNvGrpSpPr/>
-          <p:nvPr/>
-        </p:nvGrpSpPr>
-        <p:grpSpPr>
-          <a:xfrm>
-            <a:off x="9556969" y="2660154"/>
-            <a:ext cx="6608045" cy="6806522"/>
-            <a:chOff x="0" y="-19050"/>
-            <a:chExt cx="1740390" cy="1792664"/>
-          </a:xfrm>
-        </p:grpSpPr>
-        <p:sp>
-          <p:nvSpPr>
-            <p:cNvPr id="3" name="Google Shape;317;p22">
-              <a:extLst>
-                <a:ext uri="{FF2B5EF4-FFF2-40B4-BE49-F238E27FC236}">
-                  <a16:creationId xmlns:a16="http://schemas.microsoft.com/office/drawing/2014/main" id="{028551F5-6165-B522-1E7C-0567CAB483AF}"/>
-                </a:ext>
-              </a:extLst>
-            </p:cNvPr>
-            <p:cNvSpPr/>
-            <p:nvPr/>
-          </p:nvSpPr>
-          <p:spPr>
-            <a:xfrm>
-              <a:off x="0" y="0"/>
-              <a:ext cx="1740390" cy="1773614"/>
-            </a:xfrm>
-            <a:custGeom>
-              <a:avLst/>
-              <a:gdLst/>
-              <a:ahLst/>
-              <a:cxnLst/>
-              <a:rect l="l" t="t" r="r" b="b"/>
-              <a:pathLst>
-                <a:path w="1740390" h="1773614" extrusionOk="0">
-                  <a:moveTo>
-                    <a:pt x="23432" y="0"/>
-                  </a:moveTo>
-                  <a:lnTo>
-                    <a:pt x="1716959" y="0"/>
-                  </a:lnTo>
-                  <a:cubicBezTo>
-                    <a:pt x="1723173" y="0"/>
-                    <a:pt x="1729133" y="2469"/>
-                    <a:pt x="1733528" y="6863"/>
-                  </a:cubicBezTo>
-                  <a:cubicBezTo>
-                    <a:pt x="1737922" y="11257"/>
-                    <a:pt x="1740390" y="17217"/>
-                    <a:pt x="1740390" y="23432"/>
-                  </a:cubicBezTo>
-                  <a:lnTo>
-                    <a:pt x="1740390" y="1750183"/>
-                  </a:lnTo>
-                  <a:cubicBezTo>
-                    <a:pt x="1740390" y="1756397"/>
-                    <a:pt x="1737922" y="1762357"/>
-                    <a:pt x="1733528" y="1766751"/>
-                  </a:cubicBezTo>
-                  <a:cubicBezTo>
-                    <a:pt x="1729133" y="1771146"/>
-                    <a:pt x="1723173" y="1773614"/>
-                    <a:pt x="1716959" y="1773614"/>
-                  </a:cubicBezTo>
-                  <a:lnTo>
-                    <a:pt x="23432" y="1773614"/>
-                  </a:lnTo>
-                  <a:cubicBezTo>
-                    <a:pt x="17217" y="1773614"/>
-                    <a:pt x="11257" y="1771146"/>
-                    <a:pt x="6863" y="1766751"/>
-                  </a:cubicBezTo>
-                  <a:cubicBezTo>
-                    <a:pt x="2469" y="1762357"/>
-                    <a:pt x="0" y="1756397"/>
-                    <a:pt x="0" y="1750183"/>
-                  </a:cubicBezTo>
-                  <a:lnTo>
-                    <a:pt x="0" y="23432"/>
-                  </a:lnTo>
-                  <a:cubicBezTo>
-                    <a:pt x="0" y="17217"/>
-                    <a:pt x="2469" y="11257"/>
-                    <a:pt x="6863" y="6863"/>
-                  </a:cubicBezTo>
-                  <a:cubicBezTo>
-                    <a:pt x="11257" y="2469"/>
-                    <a:pt x="17217" y="0"/>
-                    <a:pt x="23432" y="0"/>
-                  </a:cubicBezTo>
-                  <a:close/>
-                </a:path>
-              </a:pathLst>
-            </a:custGeom>
-            <a:solidFill>
-              <a:srgbClr val="1B0D39"/>
-            </a:solidFill>
-            <a:ln>
-              <a:noFill/>
-            </a:ln>
-          </p:spPr>
-          <p:txBody>
-            <a:bodyPr spcFirstLastPara="1" wrap="square" lIns="91425" tIns="91425" rIns="91425" bIns="91425" anchor="ctr" anchorCtr="0">
-              <a:noAutofit/>
-            </a:bodyPr>
-            <a:lstStyle/>
-            <a:p>
-              <a:pPr marL="0" lvl="0" indent="0" algn="l" rtl="0">
-                <a:spcBef>
-                  <a:spcPts val="0"/>
-                </a:spcBef>
-                <a:spcAft>
-                  <a:spcPts val="0"/>
-                </a:spcAft>
-                <a:buNone/>
-              </a:pPr>
-              <a:endParaRPr/>
-            </a:p>
-          </p:txBody>
-        </p:sp>
-        <p:sp>
-          <p:nvSpPr>
-            <p:cNvPr id="4" name="Google Shape;318;p22">
-              <a:extLst>
-                <a:ext uri="{FF2B5EF4-FFF2-40B4-BE49-F238E27FC236}">
-                  <a16:creationId xmlns:a16="http://schemas.microsoft.com/office/drawing/2014/main" id="{180C1B4B-760D-AAA8-6968-F5E1A8B8708C}"/>
-                </a:ext>
-              </a:extLst>
-            </p:cNvPr>
-            <p:cNvSpPr txBox="1"/>
-            <p:nvPr/>
-          </p:nvSpPr>
-          <p:spPr>
-            <a:xfrm>
-              <a:off x="0" y="-19050"/>
-              <a:ext cx="1740390" cy="1792664"/>
-            </a:xfrm>
-            <a:prstGeom prst="rect">
-              <a:avLst/>
-            </a:prstGeom>
-            <a:noFill/>
-            <a:ln>
-              <a:noFill/>
-            </a:ln>
-          </p:spPr>
-          <p:txBody>
-            <a:bodyPr spcFirstLastPara="1" wrap="square" lIns="50800" tIns="50800" rIns="50800" bIns="50800" anchor="ctr" anchorCtr="0">
-              <a:noAutofit/>
-            </a:bodyPr>
-            <a:lstStyle/>
-            <a:p>
-              <a:pPr marL="0" marR="0" lvl="0" indent="0" algn="ctr" rtl="0">
-                <a:lnSpc>
-                  <a:spcPct val="130000"/>
-                </a:lnSpc>
-                <a:spcBef>
-                  <a:spcPts val="0"/>
-                </a:spcBef>
-                <a:spcAft>
-                  <a:spcPts val="0"/>
-                </a:spcAft>
-                <a:buNone/>
-              </a:pPr>
-              <a:endParaRPr sz="1800" b="0" i="0" u="none" strike="noStrike" cap="none">
-                <a:solidFill>
-                  <a:schemeClr val="dk1"/>
-                </a:solidFill>
-                <a:latin typeface="Calibri"/>
-                <a:ea typeface="Calibri"/>
-                <a:cs typeface="Calibri"/>
-                <a:sym typeface="Calibri"/>
-              </a:endParaRPr>
-            </a:p>
-          </p:txBody>
-        </p:sp>
-      </p:grpSp>
-      <p:sp>
-        <p:nvSpPr>
-          <p:cNvPr id="5" name="Google Shape;324;p22">
-            <a:extLst>
-              <a:ext uri="{FF2B5EF4-FFF2-40B4-BE49-F238E27FC236}">
-                <a16:creationId xmlns:a16="http://schemas.microsoft.com/office/drawing/2014/main" id="{63A7EC47-76DD-AAA5-359F-85CE50DC67B3}"/>
+                <a16:creationId xmlns:a16="http://schemas.microsoft.com/office/drawing/2014/main" id="{7F0B0AFA-AEEF-125C-2685-797EA0B16D48}"/>
               </a:ext>
             </a:extLst>
           </p:cNvPr>
@@ -12050,8 +11847,8 @@
         </p:nvSpPr>
         <p:spPr>
           <a:xfrm>
-            <a:off x="10136841" y="3532723"/>
-            <a:ext cx="5448300" cy="3804118"/>
+            <a:off x="1887102" y="3300615"/>
+            <a:ext cx="11868086" cy="4875181"/>
           </a:xfrm>
           <a:prstGeom prst="rect">
             <a:avLst/>
@@ -12067,16 +11864,10 @@
           </a:bodyPr>
           <a:lstStyle/>
           <a:p>
-            <a:pPr marL="342900" marR="0" lvl="0" indent="-342900" algn="l" rtl="0">
+            <a:pPr marL="342900" lvl="0" indent="-342900">
               <a:lnSpc>
                 <a:spcPct val="119958"/>
               </a:lnSpc>
-              <a:spcBef>
-                <a:spcPts val="0"/>
-              </a:spcBef>
-              <a:spcAft>
-                <a:spcPts val="0"/>
-              </a:spcAft>
               <a:buClr>
                 <a:schemeClr val="bg1"/>
               </a:buClr>
@@ -12084,326 +11875,139 @@
               <a:buChar char="Ø"/>
             </a:pPr>
             <a:r>
-              <a:rPr lang="en-US" sz="2400" b="1" i="0" u="none" strike="noStrike" cap="none" dirty="0" err="1">
-                <a:solidFill>
-                  <a:srgbClr val="F9F6FF"/>
-                </a:solidFill>
-                <a:latin typeface="Inclusive Sans"/>
-                <a:ea typeface="Inclusive Sans"/>
-                <a:cs typeface="Inclusive Sans"/>
-                <a:sym typeface="Inclusive Sans"/>
-              </a:rPr>
-              <a:t>Toate</a:t>
-            </a:r>
-            <a:r>
-              <a:rPr lang="en-US" sz="2400" b="1" i="0" u="none" strike="noStrike" cap="none" dirty="0">
-                <a:solidFill>
-                  <a:srgbClr val="F9F6FF"/>
-                </a:solidFill>
-                <a:latin typeface="Inclusive Sans"/>
-                <a:ea typeface="Inclusive Sans"/>
-                <a:cs typeface="Inclusive Sans"/>
-                <a:sym typeface="Inclusive Sans"/>
+              <a:rPr lang="en-US" sz="2400" b="1" dirty="0" err="1">
+                <a:solidFill>
+                  <a:schemeClr val="bg1"/>
+                </a:solidFill>
+              </a:rPr>
+              <a:t>Monitorizarea</a:t>
+            </a:r>
+            <a:r>
+              <a:rPr lang="en-US" sz="2400" b="1" dirty="0">
+                <a:solidFill>
+                  <a:schemeClr val="bg1"/>
+                </a:solidFill>
               </a:rPr>
               <a:t> </a:t>
             </a:r>
             <a:r>
-              <a:rPr lang="en-US" sz="2400" b="1" i="0" u="none" strike="noStrike" cap="none" dirty="0" err="1">
-                <a:solidFill>
-                  <a:srgbClr val="F9F6FF"/>
-                </a:solidFill>
-                <a:latin typeface="Inclusive Sans"/>
-                <a:ea typeface="Inclusive Sans"/>
-                <a:cs typeface="Inclusive Sans"/>
-                <a:sym typeface="Inclusive Sans"/>
-              </a:rPr>
-              <a:t>firele</a:t>
-            </a:r>
-            <a:r>
-              <a:rPr lang="en-US" sz="2400" b="1" i="0" u="none" strike="noStrike" cap="none" dirty="0">
-                <a:solidFill>
-                  <a:srgbClr val="F9F6FF"/>
-                </a:solidFill>
-                <a:latin typeface="Inclusive Sans"/>
-                <a:ea typeface="Inclusive Sans"/>
-                <a:cs typeface="Inclusive Sans"/>
-                <a:sym typeface="Inclusive Sans"/>
-              </a:rPr>
-              <a:t> se </a:t>
-            </a:r>
-            <a:r>
-              <a:rPr lang="en-US" sz="2400" b="1" i="0" u="none" strike="noStrike" cap="none" dirty="0" err="1">
-                <a:solidFill>
-                  <a:srgbClr val="F9F6FF"/>
-                </a:solidFill>
-                <a:latin typeface="Inclusive Sans"/>
-                <a:ea typeface="Inclusive Sans"/>
-                <a:cs typeface="Inclusive Sans"/>
-                <a:sym typeface="Inclusive Sans"/>
-              </a:rPr>
-              <a:t>trezesc</a:t>
-            </a:r>
-            <a:r>
-              <a:rPr lang="en-US" sz="2400" b="1" i="0" u="none" strike="noStrike" cap="none" dirty="0">
-                <a:solidFill>
-                  <a:srgbClr val="F9F6FF"/>
-                </a:solidFill>
-                <a:latin typeface="Inclusive Sans"/>
-                <a:ea typeface="Inclusive Sans"/>
-                <a:cs typeface="Inclusive Sans"/>
-                <a:sym typeface="Inclusive Sans"/>
-              </a:rPr>
-              <a:t>, </a:t>
-            </a:r>
-            <a:r>
-              <a:rPr lang="en-US" sz="2400" b="1" i="0" u="none" strike="noStrike" cap="none" dirty="0" err="1">
-                <a:solidFill>
-                  <a:srgbClr val="F9F6FF"/>
-                </a:solidFill>
-                <a:latin typeface="Inclusive Sans"/>
-                <a:ea typeface="Inclusive Sans"/>
-                <a:cs typeface="Inclusive Sans"/>
-                <a:sym typeface="Inclusive Sans"/>
-              </a:rPr>
-              <a:t>văd</a:t>
-            </a:r>
-            <a:r>
-              <a:rPr lang="en-US" sz="2400" b="1" i="0" u="none" strike="noStrike" cap="none" dirty="0">
-                <a:solidFill>
-                  <a:srgbClr val="F9F6FF"/>
-                </a:solidFill>
-                <a:latin typeface="Inclusive Sans"/>
-                <a:ea typeface="Inclusive Sans"/>
-                <a:cs typeface="Inclusive Sans"/>
-                <a:sym typeface="Inclusive Sans"/>
+              <a:rPr lang="en-US" sz="2400" b="1" dirty="0" err="1">
+                <a:solidFill>
+                  <a:schemeClr val="bg1"/>
+                </a:solidFill>
+              </a:rPr>
+              <a:t>Resurselor</a:t>
+            </a:r>
+            <a:r>
+              <a:rPr lang="en-US" sz="2400" b="1" dirty="0">
+                <a:solidFill>
+                  <a:schemeClr val="bg1"/>
+                </a:solidFill>
               </a:rPr>
               <a:t> </a:t>
             </a:r>
             <a:r>
-              <a:rPr lang="en-US" sz="2400" b="1" i="0" u="none" strike="noStrike" cap="none" dirty="0" err="1">
-                <a:solidFill>
-                  <a:srgbClr val="F9F6FF"/>
-                </a:solidFill>
-                <a:latin typeface="Inclusive Sans"/>
-                <a:ea typeface="Inclusive Sans"/>
-                <a:cs typeface="Inclusive Sans"/>
-                <a:sym typeface="Inclusive Sans"/>
-              </a:rPr>
-              <a:t>că</a:t>
-            </a:r>
-            <a:r>
-              <a:rPr lang="en-US" sz="2400" b="1" i="0" u="none" strike="noStrike" cap="none" dirty="0">
-                <a:solidFill>
-                  <a:srgbClr val="F9F6FF"/>
-                </a:solidFill>
-                <a:latin typeface="Inclusive Sans"/>
-                <a:ea typeface="Inclusive Sans"/>
-                <a:cs typeface="Inclusive Sans"/>
-                <a:sym typeface="Inclusive Sans"/>
+              <a:rPr lang="en-US" sz="2400" b="1" dirty="0" err="1">
+                <a:solidFill>
+                  <a:schemeClr val="bg1"/>
+                </a:solidFill>
+              </a:rPr>
+              <a:t>în</a:t>
+            </a:r>
+            <a:r>
+              <a:rPr lang="en-US" sz="2400" b="1" dirty="0">
+                <a:solidFill>
+                  <a:schemeClr val="bg1"/>
+                </a:solidFill>
+              </a:rPr>
+              <a:t> Timp real: </a:t>
+            </a:r>
+            <a:r>
+              <a:rPr lang="en-US" sz="2400" b="1" dirty="0" err="1">
+                <a:solidFill>
+                  <a:schemeClr val="bg1"/>
+                </a:solidFill>
+              </a:rPr>
+              <a:t>Interogarea</a:t>
+            </a:r>
+            <a:r>
+              <a:rPr lang="en-US" sz="2400" b="1" dirty="0">
+                <a:solidFill>
+                  <a:schemeClr val="bg1"/>
+                </a:solidFill>
               </a:rPr>
               <a:t> </a:t>
             </a:r>
             <a:r>
-              <a:rPr lang="en-US" sz="2400" b="1" i="0" u="none" strike="noStrike" cap="none" dirty="0" err="1">
-                <a:solidFill>
-                  <a:srgbClr val="F9F6FF"/>
-                </a:solidFill>
-                <a:latin typeface="Inclusive Sans"/>
-                <a:ea typeface="Inclusive Sans"/>
-                <a:cs typeface="Inclusive Sans"/>
-                <a:sym typeface="Inclusive Sans"/>
-              </a:rPr>
-              <a:t>serverul</a:t>
-            </a:r>
-            <a:r>
-              <a:rPr lang="en-US" sz="2400" b="1" i="0" u="none" strike="noStrike" cap="none" dirty="0">
-                <a:solidFill>
-                  <a:srgbClr val="F9F6FF"/>
-                </a:solidFill>
-                <a:latin typeface="Inclusive Sans"/>
-                <a:ea typeface="Inclusive Sans"/>
-                <a:cs typeface="Inclusive Sans"/>
-                <a:sym typeface="Inclusive Sans"/>
-              </a:rPr>
-              <a:t> se </a:t>
-            </a:r>
-            <a:r>
-              <a:rPr lang="en-US" sz="2400" b="1" i="0" u="none" strike="noStrike" cap="none" dirty="0" err="1">
-                <a:solidFill>
-                  <a:srgbClr val="F9F6FF"/>
-                </a:solidFill>
-                <a:latin typeface="Inclusive Sans"/>
-                <a:ea typeface="Inclusive Sans"/>
-                <a:cs typeface="Inclusive Sans"/>
-                <a:sym typeface="Inclusive Sans"/>
-              </a:rPr>
-              <a:t>închide</a:t>
-            </a:r>
-            <a:r>
-              <a:rPr lang="en-US" sz="2400" b="1" i="0" u="none" strike="noStrike" cap="none" dirty="0">
-                <a:solidFill>
-                  <a:srgbClr val="F9F6FF"/>
-                </a:solidFill>
-                <a:latin typeface="Inclusive Sans"/>
-                <a:ea typeface="Inclusive Sans"/>
-                <a:cs typeface="Inclusive Sans"/>
-                <a:sym typeface="Inclusive Sans"/>
-              </a:rPr>
-              <a:t>, </a:t>
-            </a:r>
-            <a:r>
-              <a:rPr lang="en-US" sz="2400" b="1" i="0" u="none" strike="noStrike" cap="none" dirty="0" err="1">
-                <a:solidFill>
-                  <a:srgbClr val="F9F6FF"/>
-                </a:solidFill>
-                <a:latin typeface="Inclusive Sans"/>
-                <a:ea typeface="Inclusive Sans"/>
-                <a:cs typeface="Inclusive Sans"/>
-                <a:sym typeface="Inclusive Sans"/>
-              </a:rPr>
-              <a:t>dau</a:t>
-            </a:r>
-            <a:r>
-              <a:rPr lang="en-US" sz="2400" b="1" i="0" u="none" strike="noStrike" cap="none" dirty="0">
-                <a:solidFill>
-                  <a:srgbClr val="F9F6FF"/>
-                </a:solidFill>
-                <a:latin typeface="Inclusive Sans"/>
-                <a:ea typeface="Inclusive Sans"/>
-                <a:cs typeface="Inclusive Sans"/>
-                <a:sym typeface="Inclusive Sans"/>
-              </a:rPr>
-              <a:t> `break` din </a:t>
-            </a:r>
-            <a:r>
-              <a:rPr lang="en-US" sz="2400" b="1" i="0" u="none" strike="noStrike" cap="none" dirty="0" err="1">
-                <a:solidFill>
-                  <a:srgbClr val="F9F6FF"/>
-                </a:solidFill>
-                <a:latin typeface="Inclusive Sans"/>
-                <a:ea typeface="Inclusive Sans"/>
-                <a:cs typeface="Inclusive Sans"/>
-                <a:sym typeface="Inclusive Sans"/>
-              </a:rPr>
-              <a:t>buclele</a:t>
-            </a:r>
-            <a:r>
-              <a:rPr lang="en-US" sz="2400" b="1" i="0" u="none" strike="noStrike" cap="none" dirty="0">
-                <a:solidFill>
-                  <a:srgbClr val="F9F6FF"/>
-                </a:solidFill>
-                <a:latin typeface="Inclusive Sans"/>
-                <a:ea typeface="Inclusive Sans"/>
-                <a:cs typeface="Inclusive Sans"/>
-                <a:sym typeface="Inclusive Sans"/>
-              </a:rPr>
-              <a:t> infinite </a:t>
-            </a:r>
-            <a:r>
-              <a:rPr lang="en-US" sz="2400" b="1" i="0" u="none" strike="noStrike" cap="none" dirty="0" err="1">
-                <a:solidFill>
-                  <a:srgbClr val="F9F6FF"/>
-                </a:solidFill>
-                <a:latin typeface="Inclusive Sans"/>
-                <a:ea typeface="Inclusive Sans"/>
-                <a:cs typeface="Inclusive Sans"/>
-                <a:sym typeface="Inclusive Sans"/>
-              </a:rPr>
-              <a:t>și</a:t>
-            </a:r>
-            <a:r>
-              <a:rPr lang="en-US" sz="2400" b="1" i="0" u="none" strike="noStrike" cap="none" dirty="0">
-                <a:solidFill>
-                  <a:srgbClr val="F9F6FF"/>
-                </a:solidFill>
-                <a:latin typeface="Inclusive Sans"/>
-                <a:ea typeface="Inclusive Sans"/>
-                <a:cs typeface="Inclusive Sans"/>
-                <a:sym typeface="Inclusive Sans"/>
+              <a:rPr lang="en-US" sz="2400" b="1" dirty="0" err="1">
+                <a:solidFill>
+                  <a:schemeClr val="bg1"/>
+                </a:solidFill>
+              </a:rPr>
+              <a:t>numărul</a:t>
+            </a:r>
+            <a:r>
+              <a:rPr lang="en-US" sz="2400" b="1" dirty="0">
+                <a:solidFill>
+                  <a:schemeClr val="bg1"/>
+                </a:solidFill>
+              </a:rPr>
+              <a:t> de </a:t>
+            </a:r>
+            <a:r>
+              <a:rPr lang="en-US" sz="2400" b="1" dirty="0" err="1">
+                <a:solidFill>
+                  <a:schemeClr val="bg1"/>
+                </a:solidFill>
+              </a:rPr>
+              <a:t>clienți</a:t>
+            </a:r>
+            <a:r>
+              <a:rPr lang="en-US" sz="2400" b="1" dirty="0">
+                <a:solidFill>
+                  <a:schemeClr val="bg1"/>
+                </a:solidFill>
               </a:rPr>
               <a:t> </a:t>
             </a:r>
             <a:r>
-              <a:rPr lang="en-US" sz="2400" b="1" i="0" u="none" strike="noStrike" cap="none" dirty="0" err="1">
-                <a:solidFill>
-                  <a:srgbClr val="F9F6FF"/>
-                </a:solidFill>
-                <a:latin typeface="Inclusive Sans"/>
-                <a:ea typeface="Inclusive Sans"/>
-                <a:cs typeface="Inclusive Sans"/>
-                <a:sym typeface="Inclusive Sans"/>
-              </a:rPr>
-              <a:t>eliberează</a:t>
-            </a:r>
-            <a:r>
-              <a:rPr lang="en-US" sz="2400" b="1" i="0" u="none" strike="noStrike" cap="none" dirty="0">
-                <a:solidFill>
-                  <a:srgbClr val="F9F6FF"/>
-                </a:solidFill>
-                <a:latin typeface="Inclusive Sans"/>
-                <a:ea typeface="Inclusive Sans"/>
-                <a:cs typeface="Inclusive Sans"/>
-                <a:sym typeface="Inclusive Sans"/>
+              <a:rPr lang="en-US" sz="2400" b="1" dirty="0" err="1">
+                <a:solidFill>
+                  <a:schemeClr val="bg1"/>
+                </a:solidFill>
+              </a:rPr>
+              <a:t>conectați</a:t>
+            </a:r>
+            <a:r>
+              <a:rPr lang="en-US" sz="2400" b="1" dirty="0">
+                <a:solidFill>
+                  <a:schemeClr val="bg1"/>
+                </a:solidFill>
               </a:rPr>
               <a:t> </a:t>
             </a:r>
             <a:r>
-              <a:rPr lang="en-US" sz="2400" b="1" i="0" u="none" strike="noStrike" cap="none" dirty="0" err="1">
-                <a:solidFill>
-                  <a:srgbClr val="F9F6FF"/>
-                </a:solidFill>
-                <a:latin typeface="Inclusive Sans"/>
-                <a:ea typeface="Inclusive Sans"/>
-                <a:cs typeface="Inclusive Sans"/>
-                <a:sym typeface="Inclusive Sans"/>
-              </a:rPr>
-              <a:t>complet</a:t>
-            </a:r>
-            <a:r>
-              <a:rPr lang="en-US" sz="2400" b="1" i="0" u="none" strike="noStrike" cap="none" dirty="0">
-                <a:solidFill>
-                  <a:srgbClr val="F9F6FF"/>
-                </a:solidFill>
-                <a:latin typeface="Inclusive Sans"/>
-                <a:ea typeface="Inclusive Sans"/>
-                <a:cs typeface="Inclusive Sans"/>
-                <a:sym typeface="Inclusive Sans"/>
+              <a:rPr lang="en-US" sz="2400" b="1" dirty="0" err="1">
+                <a:solidFill>
+                  <a:schemeClr val="bg1"/>
+                </a:solidFill>
+              </a:rPr>
+              <a:t>simultan</a:t>
+            </a:r>
+            <a:r>
+              <a:rPr lang="en-US" sz="2400" b="1" dirty="0">
+                <a:solidFill>
+                  <a:schemeClr val="bg1"/>
+                </a:solidFill>
               </a:rPr>
               <a:t> </a:t>
             </a:r>
-            <a:r>
-              <a:rPr lang="en-US" sz="2400" b="1" i="0" u="none" strike="noStrike" cap="none" dirty="0" err="1">
-                <a:solidFill>
-                  <a:srgbClr val="F9F6FF"/>
-                </a:solidFill>
-                <a:latin typeface="Inclusive Sans"/>
-                <a:ea typeface="Inclusive Sans"/>
-                <a:cs typeface="Inclusive Sans"/>
-                <a:sym typeface="Inclusive Sans"/>
-              </a:rPr>
-              <a:t>memoria</a:t>
-            </a:r>
-            <a:endParaRPr lang="en-US" sz="2400" b="1" i="0" u="none" strike="noStrike" cap="none" dirty="0">
-              <a:solidFill>
-                <a:srgbClr val="F9F6FF"/>
-              </a:solidFill>
-              <a:latin typeface="Inclusive Sans"/>
-              <a:ea typeface="Inclusive Sans"/>
-              <a:cs typeface="Inclusive Sans"/>
-              <a:sym typeface="Inclusive Sans"/>
-            </a:endParaRPr>
           </a:p>
           <a:p>
-            <a:pPr marL="342900" marR="0" lvl="0" indent="-342900" algn="l" rtl="0">
+            <a:pPr marL="342900" lvl="0" indent="-342900">
               <a:lnSpc>
                 <a:spcPct val="119958"/>
               </a:lnSpc>
-              <a:spcBef>
-                <a:spcPts val="0"/>
-              </a:spcBef>
-              <a:spcAft>
-                <a:spcPts val="0"/>
-              </a:spcAft>
               <a:buClr>
                 <a:schemeClr val="bg1"/>
               </a:buClr>
@@ -12412,25 +12016,15 @@
             </a:pPr>
             <a:endParaRPr lang="en-US" sz="2400" b="1" dirty="0">
               <a:solidFill>
-                <a:srgbClr val="F9F6FF"/>
+                <a:schemeClr val="bg1"/>
               </a:solidFill>
-              <a:latin typeface="Inclusive Sans"/>
-              <a:ea typeface="Inclusive Sans"/>
-              <a:cs typeface="Inclusive Sans"/>
-              <a:sym typeface="Inclusive Sans"/>
             </a:endParaRPr>
           </a:p>
           <a:p>
-            <a:pPr marL="342900" marR="0" lvl="0" indent="-342900" algn="l" rtl="0">
+            <a:pPr marL="342900" lvl="0" indent="-342900">
               <a:lnSpc>
                 <a:spcPct val="119958"/>
               </a:lnSpc>
-              <a:spcBef>
-                <a:spcPts val="0"/>
-              </a:spcBef>
-              <a:spcAft>
-                <a:spcPts val="0"/>
-              </a:spcAft>
               <a:buClr>
                 <a:schemeClr val="bg1"/>
               </a:buClr>
@@ -12438,134 +12032,139 @@
               <a:buChar char="Ø"/>
             </a:pPr>
             <a:r>
-              <a:rPr lang="en-US" sz="2400" b="1" i="0" u="none" strike="noStrike" cap="none" dirty="0" err="1">
-                <a:solidFill>
-                  <a:srgbClr val="F9F6FF"/>
-                </a:solidFill>
-                <a:latin typeface="Inclusive Sans"/>
-                <a:ea typeface="Inclusive Sans"/>
-                <a:cs typeface="Inclusive Sans"/>
-                <a:sym typeface="Inclusive Sans"/>
-              </a:rPr>
-              <a:t>Niciun</a:t>
-            </a:r>
-            <a:r>
-              <a:rPr lang="en-US" sz="2400" b="1" i="0" u="none" strike="noStrike" cap="none" dirty="0">
-                <a:solidFill>
-                  <a:srgbClr val="F9F6FF"/>
-                </a:solidFill>
-                <a:latin typeface="Inclusive Sans"/>
-                <a:ea typeface="Inclusive Sans"/>
-                <a:cs typeface="Inclusive Sans"/>
-                <a:sym typeface="Inclusive Sans"/>
+              <a:rPr lang="en-US" sz="2400" b="1" dirty="0" err="1">
+                <a:solidFill>
+                  <a:schemeClr val="bg1"/>
+                </a:solidFill>
+              </a:rPr>
+              <a:t>Statistici</a:t>
+            </a:r>
+            <a:r>
+              <a:rPr lang="en-US" sz="2400" b="1" dirty="0">
+                <a:solidFill>
+                  <a:schemeClr val="bg1"/>
+                </a:solidFill>
+              </a:rPr>
+              <a:t>: </a:t>
+            </a:r>
+            <a:r>
+              <a:rPr lang="en-US" sz="2400" b="1" dirty="0" err="1">
+                <a:solidFill>
+                  <a:schemeClr val="bg1"/>
+                </a:solidFill>
+              </a:rPr>
+              <a:t>Calcularea</a:t>
+            </a:r>
+            <a:r>
+              <a:rPr lang="en-US" sz="2400" b="1" dirty="0">
+                <a:solidFill>
+                  <a:schemeClr val="bg1"/>
+                </a:solidFill>
               </a:rPr>
               <a:t> </a:t>
             </a:r>
             <a:r>
-              <a:rPr lang="en-US" sz="2400" b="1" i="0" u="none" strike="noStrike" cap="none" dirty="0" err="1">
-                <a:solidFill>
-                  <a:srgbClr val="F9F6FF"/>
-                </a:solidFill>
-                <a:latin typeface="Inclusive Sans"/>
-                <a:ea typeface="Inclusive Sans"/>
-                <a:cs typeface="Inclusive Sans"/>
-                <a:sym typeface="Inclusive Sans"/>
-              </a:rPr>
-              <a:t>proces</a:t>
-            </a:r>
-            <a:r>
-              <a:rPr lang="en-US" sz="2400" b="1" i="0" u="none" strike="noStrike" cap="none" dirty="0">
-                <a:solidFill>
-                  <a:srgbClr val="F9F6FF"/>
-                </a:solidFill>
-                <a:latin typeface="Inclusive Sans"/>
-                <a:ea typeface="Inclusive Sans"/>
-                <a:cs typeface="Inclusive Sans"/>
-                <a:sym typeface="Inclusive Sans"/>
-              </a:rPr>
-              <a:t> zombie nu </a:t>
-            </a:r>
-            <a:r>
-              <a:rPr lang="en-US" sz="2400" b="1" i="0" u="none" strike="noStrike" cap="none" dirty="0" err="1">
-                <a:solidFill>
-                  <a:srgbClr val="F9F6FF"/>
-                </a:solidFill>
-                <a:latin typeface="Inclusive Sans"/>
-                <a:ea typeface="Inclusive Sans"/>
-                <a:cs typeface="Inclusive Sans"/>
-                <a:sym typeface="Inclusive Sans"/>
-              </a:rPr>
-              <a:t>rămâne</a:t>
-            </a:r>
-            <a:r>
-              <a:rPr lang="en-US" sz="2400" b="1" i="0" u="none" strike="noStrike" cap="none" dirty="0">
-                <a:solidFill>
-                  <a:srgbClr val="F9F6FF"/>
-                </a:solidFill>
-                <a:latin typeface="Inclusive Sans"/>
-                <a:ea typeface="Inclusive Sans"/>
-                <a:cs typeface="Inclusive Sans"/>
-                <a:sym typeface="Inclusive Sans"/>
+              <a:rPr lang="en-US" sz="2400" b="1" dirty="0" err="1">
+                <a:solidFill>
+                  <a:schemeClr val="bg1"/>
+                </a:solidFill>
+              </a:rPr>
+              <a:t>timpului</a:t>
+            </a:r>
+            <a:r>
+              <a:rPr lang="en-US" sz="2400" b="1" dirty="0">
+                <a:solidFill>
+                  <a:schemeClr val="bg1"/>
+                </a:solidFill>
               </a:rPr>
               <a:t> </a:t>
             </a:r>
             <a:r>
-              <a:rPr lang="en-US" sz="2400" b="1" i="0" u="none" strike="noStrike" cap="none" dirty="0" err="1">
-                <a:solidFill>
-                  <a:srgbClr val="F9F6FF"/>
-                </a:solidFill>
-                <a:latin typeface="Inclusive Sans"/>
-                <a:ea typeface="Inclusive Sans"/>
-                <a:cs typeface="Inclusive Sans"/>
-                <a:sym typeface="Inclusive Sans"/>
-              </a:rPr>
-              <a:t>în</a:t>
-            </a:r>
-            <a:r>
-              <a:rPr lang="en-US" sz="2400" b="1" i="0" u="none" strike="noStrike" cap="none" dirty="0">
-                <a:solidFill>
-                  <a:srgbClr val="F9F6FF"/>
-                </a:solidFill>
-                <a:latin typeface="Inclusive Sans"/>
-                <a:ea typeface="Inclusive Sans"/>
-                <a:cs typeface="Inclusive Sans"/>
-                <a:sym typeface="Inclusive Sans"/>
-              </a:rPr>
-              <a:t> </a:t>
-            </a:r>
-            <a:r>
-              <a:rPr lang="en-US" sz="2400" b="1" i="0" u="none" strike="noStrike" cap="none" dirty="0" err="1">
-                <a:solidFill>
-                  <a:srgbClr val="F9F6FF"/>
-                </a:solidFill>
-                <a:latin typeface="Inclusive Sans"/>
-                <a:ea typeface="Inclusive Sans"/>
-                <a:cs typeface="Inclusive Sans"/>
-                <a:sym typeface="Inclusive Sans"/>
-              </a:rPr>
-              <a:t>urmă</a:t>
-            </a:r>
-            <a:endParaRPr lang="en-US" sz="2400" b="1" dirty="0">
-              <a:solidFill>
-                <a:srgbClr val="F9F6FF"/>
-              </a:solidFill>
-              <a:latin typeface="Inclusive Sans"/>
-              <a:ea typeface="Inclusive Sans"/>
-              <a:cs typeface="Inclusive Sans"/>
-              <a:sym typeface="Inclusive Sans"/>
-            </a:endParaRPr>
+              <a:rPr lang="en-US" sz="2400" b="1" dirty="0" err="1">
+                <a:solidFill>
+                  <a:schemeClr val="bg1"/>
+                </a:solidFill>
+              </a:rPr>
+              <a:t>mediu</a:t>
+            </a:r>
+            <a:r>
+              <a:rPr lang="en-US" sz="2400" b="1" dirty="0">
+                <a:solidFill>
+                  <a:schemeClr val="bg1"/>
+                </a:solidFill>
+              </a:rPr>
+              <a:t> de </a:t>
+            </a:r>
+            <a:r>
+              <a:rPr lang="en-US" sz="2400" b="1" dirty="0" err="1">
+                <a:solidFill>
+                  <a:schemeClr val="bg1"/>
+                </a:solidFill>
+              </a:rPr>
+              <a:t>execuție</a:t>
+            </a:r>
+            <a:r>
+              <a:rPr lang="en-US" sz="2400" b="1" dirty="0">
+                <a:solidFill>
+                  <a:schemeClr val="bg1"/>
+                </a:solidFill>
+              </a:rPr>
+              <a:t> per test </a:t>
+            </a:r>
+            <a:r>
+              <a:rPr lang="en-US" sz="2400" b="1" dirty="0" err="1">
+                <a:solidFill>
+                  <a:schemeClr val="bg1"/>
+                </a:solidFill>
+              </a:rPr>
+              <a:t>și</a:t>
+            </a:r>
+            <a:r>
+              <a:rPr lang="en-US" sz="2400" b="1" dirty="0">
+                <a:solidFill>
+                  <a:schemeClr val="bg1"/>
+                </a:solidFill>
+              </a:rPr>
+              <a:t> rata de </a:t>
+            </a:r>
+            <a:r>
+              <a:rPr lang="en-US" sz="2400" b="1" dirty="0" err="1">
+                <a:solidFill>
+                  <a:schemeClr val="bg1"/>
+                </a:solidFill>
+              </a:rPr>
+              <a:t>succes</a:t>
+            </a:r>
+            <a:r>
+              <a:rPr lang="en-US" sz="2400" b="1" dirty="0">
+                <a:solidFill>
+                  <a:schemeClr val="bg1"/>
+                </a:solidFill>
+              </a:rPr>
+              <a:t> a </a:t>
+            </a:r>
+            <a:r>
+              <a:rPr lang="en-US" sz="2400" b="1" dirty="0" err="1">
+                <a:solidFill>
+                  <a:schemeClr val="bg1"/>
+                </a:solidFill>
+              </a:rPr>
+              <a:t>motorului</a:t>
+            </a:r>
+            <a:r>
+              <a:rPr lang="en-US" sz="2400" b="1" dirty="0">
+                <a:solidFill>
+                  <a:schemeClr val="bg1"/>
+                </a:solidFill>
+              </a:rPr>
+              <a:t> OpenCV </a:t>
+            </a:r>
           </a:p>
           <a:p>
-            <a:pPr marL="342900" marR="0" lvl="0" indent="-342900" algn="l" rtl="0">
+            <a:pPr marL="342900" lvl="0" indent="-342900">
               <a:lnSpc>
                 <a:spcPct val="119958"/>
               </a:lnSpc>
-              <a:spcBef>
-                <a:spcPts val="0"/>
-              </a:spcBef>
-              <a:spcAft>
-                <a:spcPts val="0"/>
-              </a:spcAft>
               <a:buClr>
                 <a:schemeClr val="bg1"/>
               </a:buClr>
@@ -12574,35 +12173,544 @@
             </a:pPr>
             <a:endParaRPr lang="en-US" sz="2400" b="1" dirty="0">
               <a:solidFill>
-                <a:srgbClr val="F9F6FF"/>
+                <a:schemeClr val="bg1"/>
               </a:solidFill>
-              <a:latin typeface="Inclusive Sans"/>
-              <a:cs typeface="Inclusive Sans"/>
-              <a:sym typeface="Inclusive Sans"/>
             </a:endParaRPr>
           </a:p>
           <a:p>
-            <a:pPr marL="342900" marR="0" lvl="0" indent="-342900" algn="l" rtl="0">
+            <a:pPr marL="342900" lvl="0" indent="-342900">
               <a:lnSpc>
                 <a:spcPct val="119958"/>
               </a:lnSpc>
-              <a:spcBef>
-                <a:spcPts val="0"/>
-              </a:spcBef>
-              <a:spcAft>
-                <a:spcPts val="0"/>
-              </a:spcAft>
               <a:buClr>
                 <a:schemeClr val="bg1"/>
               </a:buClr>
               <a:buFont typeface="Wingdings" panose="05000000000000000000" pitchFamily="2" charset="2"/>
               <a:buChar char="Ø"/>
             </a:pPr>
-            <a:endParaRPr lang="en-US" dirty="0"/>
+            <a:r>
+              <a:rPr lang="en-US" sz="2400" b="1" dirty="0" err="1">
+                <a:solidFill>
+                  <a:schemeClr val="bg1"/>
+                </a:solidFill>
+              </a:rPr>
+              <a:t>Istoric</a:t>
+            </a:r>
+            <a:r>
+              <a:rPr lang="en-US" sz="2400" b="1" dirty="0">
+                <a:solidFill>
+                  <a:schemeClr val="bg1"/>
+                </a:solidFill>
+              </a:rPr>
+              <a:t>: </a:t>
+            </a:r>
+            <a:r>
+              <a:rPr lang="en-US" sz="2400" b="1" dirty="0" err="1">
+                <a:solidFill>
+                  <a:schemeClr val="bg1"/>
+                </a:solidFill>
+              </a:rPr>
+              <a:t>Istoricul</a:t>
+            </a:r>
+            <a:r>
+              <a:rPr lang="en-US" sz="2400" b="1" dirty="0">
+                <a:solidFill>
+                  <a:schemeClr val="bg1"/>
+                </a:solidFill>
+              </a:rPr>
+              <a:t> </a:t>
+            </a:r>
+            <a:r>
+              <a:rPr lang="en-US" sz="2400" b="1" dirty="0" err="1">
+                <a:solidFill>
+                  <a:schemeClr val="bg1"/>
+                </a:solidFill>
+              </a:rPr>
+              <a:t>ultimelor</a:t>
+            </a:r>
+            <a:r>
+              <a:rPr lang="en-US" sz="2400" b="1" dirty="0">
+                <a:solidFill>
+                  <a:schemeClr val="bg1"/>
+                </a:solidFill>
+              </a:rPr>
+              <a:t> note </a:t>
+            </a:r>
+            <a:r>
+              <a:rPr lang="en-US" sz="2400" b="1" dirty="0" err="1">
+                <a:solidFill>
+                  <a:schemeClr val="bg1"/>
+                </a:solidFill>
+              </a:rPr>
+              <a:t>acordate</a:t>
+            </a:r>
+            <a:r>
+              <a:rPr lang="en-US" sz="2400" b="1" dirty="0">
+                <a:solidFill>
+                  <a:schemeClr val="bg1"/>
+                </a:solidFill>
+              </a:rPr>
+              <a:t> </a:t>
+            </a:r>
+            <a:r>
+              <a:rPr lang="en-US" sz="2400" b="1" dirty="0" err="1">
+                <a:solidFill>
+                  <a:schemeClr val="bg1"/>
+                </a:solidFill>
+              </a:rPr>
+              <a:t>cât</a:t>
+            </a:r>
+            <a:r>
+              <a:rPr lang="en-US" sz="2400" b="1" dirty="0">
+                <a:solidFill>
+                  <a:schemeClr val="bg1"/>
+                </a:solidFill>
+              </a:rPr>
+              <a:t> </a:t>
+            </a:r>
+            <a:r>
+              <a:rPr lang="en-US" sz="2400" b="1" dirty="0" err="1">
+                <a:solidFill>
+                  <a:schemeClr val="bg1"/>
+                </a:solidFill>
+              </a:rPr>
+              <a:t>și</a:t>
+            </a:r>
+            <a:r>
+              <a:rPr lang="en-US" sz="2400" b="1" dirty="0">
+                <a:solidFill>
+                  <a:schemeClr val="bg1"/>
+                </a:solidFill>
+              </a:rPr>
+              <a:t> </a:t>
+            </a:r>
+            <a:r>
+              <a:rPr lang="en-US" sz="2400" b="1" dirty="0" err="1">
+                <a:solidFill>
+                  <a:schemeClr val="bg1"/>
+                </a:solidFill>
+              </a:rPr>
+              <a:t>posibilitatea</a:t>
+            </a:r>
+            <a:r>
+              <a:rPr lang="en-US" sz="2400" b="1" dirty="0">
+                <a:solidFill>
+                  <a:schemeClr val="bg1"/>
+                </a:solidFill>
+              </a:rPr>
+              <a:t> de a </a:t>
+            </a:r>
+            <a:r>
+              <a:rPr lang="en-US" sz="2400" b="1" dirty="0" err="1">
+                <a:solidFill>
+                  <a:schemeClr val="bg1"/>
+                </a:solidFill>
+              </a:rPr>
+              <a:t>vedea</a:t>
+            </a:r>
+            <a:r>
+              <a:rPr lang="en-US" sz="2400" b="1" dirty="0">
+                <a:solidFill>
+                  <a:schemeClr val="bg1"/>
+                </a:solidFill>
+              </a:rPr>
+              <a:t> </a:t>
+            </a:r>
+            <a:r>
+              <a:rPr lang="en-US" sz="2400" b="1" dirty="0" err="1">
+                <a:solidFill>
+                  <a:schemeClr val="bg1"/>
+                </a:solidFill>
+              </a:rPr>
+              <a:t>procesul</a:t>
+            </a:r>
+            <a:r>
+              <a:rPr lang="en-US" sz="2400" b="1" dirty="0">
+                <a:solidFill>
+                  <a:schemeClr val="bg1"/>
+                </a:solidFill>
+              </a:rPr>
+              <a:t> care </a:t>
+            </a:r>
+            <a:r>
+              <a:rPr lang="en-US" sz="2400" b="1" dirty="0" err="1">
+                <a:solidFill>
+                  <a:schemeClr val="bg1"/>
+                </a:solidFill>
+              </a:rPr>
+              <a:t>executa</a:t>
+            </a:r>
+            <a:r>
+              <a:rPr lang="en-US" sz="2400" b="1" dirty="0">
+                <a:solidFill>
+                  <a:schemeClr val="bg1"/>
+                </a:solidFill>
+              </a:rPr>
+              <a:t> </a:t>
+            </a:r>
+            <a:r>
+              <a:rPr lang="en-US" sz="2400" b="1" dirty="0" err="1">
+                <a:solidFill>
+                  <a:schemeClr val="bg1"/>
+                </a:solidFill>
+              </a:rPr>
+              <a:t>acum</a:t>
+            </a:r>
+            <a:r>
+              <a:rPr lang="en-US" sz="2400" b="1" dirty="0">
+                <a:solidFill>
+                  <a:schemeClr val="bg1"/>
+                </a:solidFill>
+              </a:rPr>
+              <a:t> </a:t>
+            </a:r>
+          </a:p>
+          <a:p>
+            <a:pPr marL="342900" lvl="0" indent="-342900">
+              <a:lnSpc>
+                <a:spcPct val="119958"/>
+              </a:lnSpc>
+              <a:buClr>
+                <a:schemeClr val="bg1"/>
+              </a:buClr>
+              <a:buFont typeface="Wingdings" panose="05000000000000000000" pitchFamily="2" charset="2"/>
+              <a:buChar char="Ø"/>
+            </a:pPr>
+            <a:endParaRPr lang="en-US" sz="2400" b="1" dirty="0">
+              <a:solidFill>
+                <a:schemeClr val="bg1"/>
+              </a:solidFill>
+            </a:endParaRPr>
+          </a:p>
+          <a:p>
+            <a:pPr marL="342900" lvl="0" indent="-342900">
+              <a:lnSpc>
+                <a:spcPct val="119958"/>
+              </a:lnSpc>
+              <a:buClr>
+                <a:schemeClr val="bg1"/>
+              </a:buClr>
+              <a:buFont typeface="Wingdings" panose="05000000000000000000" pitchFamily="2" charset="2"/>
+              <a:buChar char="Ø"/>
+            </a:pPr>
+            <a:r>
+              <a:rPr lang="en-US" sz="2400" b="1" dirty="0" err="1">
+                <a:solidFill>
+                  <a:schemeClr val="bg1"/>
+                </a:solidFill>
+              </a:rPr>
+              <a:t>Oprirea</a:t>
+            </a:r>
+            <a:r>
+              <a:rPr lang="en-US" sz="2400" b="1" dirty="0">
+                <a:solidFill>
+                  <a:schemeClr val="bg1"/>
+                </a:solidFill>
+              </a:rPr>
+              <a:t> </a:t>
+            </a:r>
+            <a:r>
+              <a:rPr lang="en-US" sz="2400" b="1" dirty="0" err="1">
+                <a:solidFill>
+                  <a:schemeClr val="bg1"/>
+                </a:solidFill>
+              </a:rPr>
+              <a:t>Sincrona</a:t>
+            </a:r>
+            <a:r>
+              <a:rPr lang="en-US" sz="2400" b="1" dirty="0">
+                <a:solidFill>
+                  <a:schemeClr val="bg1"/>
+                </a:solidFill>
+              </a:rPr>
+              <a:t>: </a:t>
+            </a:r>
+            <a:r>
+              <a:rPr lang="en-US" sz="2400" b="1" dirty="0" err="1">
+                <a:solidFill>
+                  <a:schemeClr val="bg1"/>
+                </a:solidFill>
+              </a:rPr>
+              <a:t>Comanda</a:t>
+            </a:r>
+            <a:r>
+              <a:rPr lang="en-US" sz="2400" b="1" dirty="0">
+                <a:solidFill>
+                  <a:schemeClr val="bg1"/>
+                </a:solidFill>
+              </a:rPr>
+              <a:t> de </a:t>
+            </a:r>
+            <a:r>
+              <a:rPr lang="en-US" sz="2400" b="1" dirty="0" err="1">
+                <a:solidFill>
+                  <a:schemeClr val="bg1"/>
+                </a:solidFill>
+              </a:rPr>
+              <a:t>oprire</a:t>
+            </a:r>
+            <a:r>
+              <a:rPr lang="en-US" sz="2400" b="1" dirty="0">
+                <a:solidFill>
+                  <a:schemeClr val="bg1"/>
+                </a:solidFill>
+              </a:rPr>
+              <a:t> care </a:t>
+            </a:r>
+            <a:r>
+              <a:rPr lang="en-US" sz="2400" b="1" dirty="0" err="1">
+                <a:solidFill>
+                  <a:schemeClr val="bg1"/>
+                </a:solidFill>
+              </a:rPr>
+              <a:t>declanșează</a:t>
+            </a:r>
+            <a:r>
+              <a:rPr lang="en-US" sz="2400" b="1" dirty="0">
+                <a:solidFill>
+                  <a:schemeClr val="bg1"/>
+                </a:solidFill>
+              </a:rPr>
+              <a:t> un </a:t>
+            </a:r>
+            <a:r>
+              <a:rPr lang="en-US" sz="2400" b="1" dirty="0" err="1">
+                <a:solidFill>
+                  <a:schemeClr val="bg1"/>
+                </a:solidFill>
+              </a:rPr>
+              <a:t>semnal</a:t>
+            </a:r>
+            <a:r>
+              <a:rPr lang="en-US" sz="2400" b="1" dirty="0">
+                <a:solidFill>
+                  <a:schemeClr val="bg1"/>
+                </a:solidFill>
+              </a:rPr>
+              <a:t> </a:t>
+            </a:r>
+            <a:r>
+              <a:rPr lang="en-US" sz="2400" b="1" dirty="0" err="1">
+                <a:solidFill>
+                  <a:schemeClr val="bg1"/>
+                </a:solidFill>
+              </a:rPr>
+              <a:t>și</a:t>
+            </a:r>
+            <a:r>
+              <a:rPr lang="en-US" sz="2400" b="1" dirty="0">
+                <a:solidFill>
+                  <a:schemeClr val="bg1"/>
+                </a:solidFill>
+              </a:rPr>
+              <a:t> </a:t>
+            </a:r>
+            <a:r>
+              <a:rPr lang="en-US" sz="2400" b="1" dirty="0" err="1">
+                <a:solidFill>
+                  <a:schemeClr val="bg1"/>
+                </a:solidFill>
+              </a:rPr>
+              <a:t>închide</a:t>
+            </a:r>
+            <a:r>
+              <a:rPr lang="en-US" sz="2400" b="1" dirty="0">
+                <a:solidFill>
+                  <a:schemeClr val="bg1"/>
+                </a:solidFill>
+              </a:rPr>
+              <a:t> </a:t>
+            </a:r>
+            <a:r>
+              <a:rPr lang="en-US" sz="2400" b="1" dirty="0" err="1">
+                <a:solidFill>
+                  <a:schemeClr val="bg1"/>
+                </a:solidFill>
+              </a:rPr>
+              <a:t>curat</a:t>
+            </a:r>
+            <a:r>
+              <a:rPr lang="en-US" sz="2400" b="1" dirty="0">
+                <a:solidFill>
+                  <a:schemeClr val="bg1"/>
+                </a:solidFill>
+              </a:rPr>
+              <a:t> </a:t>
+            </a:r>
+            <a:r>
+              <a:rPr lang="en-US" sz="2400" b="1" dirty="0" err="1">
+                <a:solidFill>
+                  <a:schemeClr val="bg1"/>
+                </a:solidFill>
+              </a:rPr>
+              <a:t>toate</a:t>
+            </a:r>
+            <a:r>
+              <a:rPr lang="en-US" sz="2400" b="1" dirty="0">
+                <a:solidFill>
+                  <a:schemeClr val="bg1"/>
+                </a:solidFill>
+              </a:rPr>
+              <a:t> </a:t>
+            </a:r>
+            <a:r>
+              <a:rPr lang="en-US" sz="2400" b="1" dirty="0" err="1">
+                <a:solidFill>
+                  <a:schemeClr val="bg1"/>
+                </a:solidFill>
+              </a:rPr>
+              <a:t>firele</a:t>
+            </a:r>
+            <a:r>
+              <a:rPr lang="en-US" sz="2400" b="1" dirty="0">
+                <a:solidFill>
+                  <a:schemeClr val="bg1"/>
+                </a:solidFill>
+              </a:rPr>
+              <a:t> </a:t>
+            </a:r>
+            <a:r>
+              <a:rPr lang="en-US" sz="2400" b="1" dirty="0" err="1">
+                <a:solidFill>
+                  <a:schemeClr val="bg1"/>
+                </a:solidFill>
+              </a:rPr>
+              <a:t>și</a:t>
+            </a:r>
+            <a:r>
+              <a:rPr lang="en-US" sz="2400" b="1" dirty="0">
+                <a:solidFill>
+                  <a:schemeClr val="bg1"/>
+                </a:solidFill>
+              </a:rPr>
+              <a:t> </a:t>
+            </a:r>
+            <a:r>
+              <a:rPr lang="en-US" sz="2400" b="1" dirty="0" err="1">
+                <a:solidFill>
+                  <a:schemeClr val="bg1"/>
+                </a:solidFill>
+              </a:rPr>
+              <a:t>eliberează</a:t>
+            </a:r>
+            <a:r>
+              <a:rPr lang="en-US" sz="2400" b="1" dirty="0">
+                <a:solidFill>
+                  <a:schemeClr val="bg1"/>
+                </a:solidFill>
+              </a:rPr>
+              <a:t> memoria</a:t>
+            </a:r>
+            <a:endParaRPr lang="en-US" sz="2400" b="1" i="0" u="none" strike="noStrike" cap="none" dirty="0">
+              <a:solidFill>
+                <a:schemeClr val="bg1"/>
+              </a:solidFill>
+              <a:latin typeface="Inclusive Sans"/>
+              <a:ea typeface="Inclusive Sans"/>
+              <a:cs typeface="Inclusive Sans"/>
+              <a:sym typeface="Inclusive Sans"/>
+            </a:endParaRPr>
+          </a:p>
+        </p:txBody>
+      </p:sp>
+      <p:sp>
+        <p:nvSpPr>
+          <p:cNvPr id="5" name="TextBox 4">
+            <a:extLst>
+              <a:ext uri="{FF2B5EF4-FFF2-40B4-BE49-F238E27FC236}">
+                <a16:creationId xmlns:a16="http://schemas.microsoft.com/office/drawing/2014/main" id="{0708051A-442A-0E5C-E989-B825D055506E}"/>
+              </a:ext>
+            </a:extLst>
+          </p:cNvPr>
+          <p:cNvSpPr txBox="1"/>
+          <p:nvPr/>
+        </p:nvSpPr>
+        <p:spPr>
+          <a:xfrm>
+            <a:off x="3237575" y="1285752"/>
+            <a:ext cx="11812849" cy="707886"/>
+          </a:xfrm>
+          <a:prstGeom prst="rect">
+            <a:avLst/>
+          </a:prstGeom>
+          <a:noFill/>
+        </p:spPr>
+        <p:txBody>
+          <a:bodyPr wrap="none" rtlCol="0">
+            <a:spAutoFit/>
+          </a:bodyPr>
+          <a:lstStyle/>
+          <a:p>
+            <a:r>
+              <a:rPr lang="en-US" sz="4000" b="1" dirty="0" err="1">
+                <a:solidFill>
+                  <a:srgbClr val="7030A0"/>
+                </a:solidFill>
+              </a:rPr>
+              <a:t>Funcționalitățile</a:t>
+            </a:r>
+            <a:r>
+              <a:rPr lang="en-US" sz="4000" b="1" dirty="0">
+                <a:solidFill>
+                  <a:srgbClr val="7030A0"/>
+                </a:solidFill>
+              </a:rPr>
+              <a:t> </a:t>
+            </a:r>
+            <a:r>
+              <a:rPr lang="en-US" sz="4000" b="1" dirty="0" err="1">
+                <a:solidFill>
+                  <a:srgbClr val="7030A0"/>
+                </a:solidFill>
+              </a:rPr>
+              <a:t>și</a:t>
+            </a:r>
+            <a:r>
+              <a:rPr lang="en-US" sz="4000" b="1" dirty="0">
+                <a:solidFill>
+                  <a:srgbClr val="7030A0"/>
+                </a:solidFill>
+              </a:rPr>
+              <a:t> </a:t>
+            </a:r>
+            <a:r>
+              <a:rPr lang="en-US" sz="4000" b="1" dirty="0" err="1">
+                <a:solidFill>
+                  <a:srgbClr val="7030A0"/>
+                </a:solidFill>
+              </a:rPr>
+              <a:t>Comenzile</a:t>
+            </a:r>
+            <a:r>
+              <a:rPr lang="en-US" sz="4000" b="1" dirty="0">
+                <a:solidFill>
+                  <a:srgbClr val="7030A0"/>
+                </a:solidFill>
+              </a:rPr>
+              <a:t> </a:t>
+            </a:r>
+            <a:r>
+              <a:rPr lang="en-US" sz="4000" b="1" dirty="0" err="1">
+                <a:solidFill>
+                  <a:srgbClr val="7030A0"/>
+                </a:solidFill>
+              </a:rPr>
+              <a:t>Administratorului</a:t>
+            </a:r>
+            <a:endParaRPr lang="en-US" sz="4000" b="1" dirty="0">
+              <a:solidFill>
+                <a:srgbClr val="7030A0"/>
+              </a:solidFill>
+            </a:endParaRPr>
           </a:p>
         </p:txBody>
       </p:sp>
     </p:spTree>
+    <p:extLst>
+      <p:ext uri="{BB962C8B-B14F-4D97-AF65-F5344CB8AC3E}">
+        <p14:creationId xmlns:p14="http://schemas.microsoft.com/office/powerpoint/2010/main" val="865682225"/>
+      </p:ext>
+    </p:extLst>
   </p:cSld>
   <p:clrMapOvr>
     <a:masterClrMapping/>
@@ -12610,7 +12718,7 @@
 </p:sld>
 </file>
 
-<file path=ppt/slides/slide11.xml><?xml version="1.0" encoding="utf-8"?>
+<file path=ppt/slides/slide12.xml><?xml version="1.0" encoding="utf-8"?>
 <p:sld xmlns:a="http://schemas.openxmlformats.org/drawingml/2006/main" xmlns:r="http://schemas.openxmlformats.org/officeDocument/2006/relationships" xmlns:p="http://schemas.openxmlformats.org/presentationml/2006/main">
   <p:cSld>
     <p:bg>
@@ -14442,12 +14550,8 @@
               <a:t>C</a:t>
             </a:r>
             <a:r>
-              <a:rPr lang="ro-RO" sz="2800" dirty="0" err="1"/>
-              <a:t>ompară</a:t>
-            </a:r>
-            <a:r>
               <a:rPr lang="ro-RO" sz="2800" dirty="0"/>
-              <a:t> răspunsurile studenți</a:t>
+              <a:t>ompară răspunsurile studenți</a:t>
             </a:r>
             <a:r>
               <a:rPr lang="en-US" sz="2800" dirty="0"/>
@@ -15051,10 +15155,10 @@
       </p:sp>
       <p:pic>
         <p:nvPicPr>
-          <p:cNvPr id="3" name="Imagine 2">
+          <p:cNvPr id="8" name="Picture 7">
             <a:extLst>
               <a:ext uri="{FF2B5EF4-FFF2-40B4-BE49-F238E27FC236}">
-                <a16:creationId xmlns:a16="http://schemas.microsoft.com/office/drawing/2014/main" id="{DD7829B6-2C86-6413-E00D-82E55FCFEAF1}"/>
+                <a16:creationId xmlns:a16="http://schemas.microsoft.com/office/drawing/2014/main" id="{75D5A779-3B4C-F3AE-8871-2EC82A6F3A99}"/>
               </a:ext>
             </a:extLst>
           </p:cNvPr>
@@ -15072,7 +15176,7 @@
         <p:spPr>
           <a:xfrm>
             <a:off x="7177130" y="2399082"/>
-            <a:ext cx="10591800" cy="5716808"/>
+            <a:ext cx="10652889" cy="5488836"/>
           </a:xfrm>
           <a:prstGeom prst="rect">
             <a:avLst/>
@@ -15699,7 +15803,7 @@
                 <a:cs typeface="Inclusive Sans"/>
                 <a:sym typeface="Inclusive Sans"/>
               </a:rPr>
-              <a:t>Citește fișierul barem.txt dinamic la pornire</a:t>
+              <a:t>Asteapta ca clientul sa trimita baremul si poza </a:t>
             </a:r>
             <a:endParaRPr lang="en-US" dirty="0"/>
           </a:p>
@@ -15882,8 +15986,8 @@
         </p:nvSpPr>
         <p:spPr>
           <a:xfrm>
-            <a:off x="3028755" y="6183854"/>
-            <a:ext cx="3459163" cy="1615250"/>
+            <a:off x="2386513" y="6123224"/>
+            <a:ext cx="4743643" cy="1076833"/>
           </a:xfrm>
           <a:prstGeom prst="rect">
             <a:avLst/>
@@ -15921,7 +16025,7 @@
                 <a:cs typeface="Inclusive Sans"/>
                 <a:sym typeface="Inclusive Sans"/>
               </a:rPr>
-              <a:t>Dacă</a:t>
+              <a:t>Pregatire</a:t>
             </a:r>
             <a:r>
               <a:rPr lang="en-US" sz="2499" b="0" i="0" u="none" strike="noStrike" cap="none" dirty="0">
@@ -15945,7 +16049,7 @@
                 <a:cs typeface="Inclusive Sans"/>
                 <a:sym typeface="Inclusive Sans"/>
               </a:rPr>
-              <a:t>lipsește</a:t>
+              <a:t>coada</a:t>
             </a:r>
             <a:r>
               <a:rPr lang="en-US" sz="2499" b="0" i="0" u="none" strike="noStrike" cap="none" dirty="0">
@@ -15957,7 +16061,7 @@
                 <a:cs typeface="Inclusive Sans"/>
                 <a:sym typeface="Inclusive Sans"/>
               </a:rPr>
-              <a:t>, </a:t>
+              <a:t> FIFO, mutex </a:t>
             </a:r>
             <a:r>
               <a:rPr lang="en-US" sz="2499" b="0" i="0" u="none" strike="noStrike" cap="none" dirty="0" err="1">
@@ -15969,7 +16073,7 @@
                 <a:cs typeface="Inclusive Sans"/>
                 <a:sym typeface="Inclusive Sans"/>
               </a:rPr>
-              <a:t>refuză</a:t>
+              <a:t>si</a:t>
             </a:r>
             <a:r>
               <a:rPr lang="en-US" sz="2499" b="0" i="0" u="none" strike="noStrike" cap="none" dirty="0">
@@ -15993,7 +16097,7 @@
                 <a:cs typeface="Inclusive Sans"/>
                 <a:sym typeface="Inclusive Sans"/>
               </a:rPr>
-              <a:t>să</a:t>
+              <a:t>variabilele</a:t>
             </a:r>
             <a:r>
               <a:rPr lang="en-US" sz="2499" b="0" i="0" u="none" strike="noStrike" cap="none" dirty="0">
@@ -16005,7 +16109,7 @@
                 <a:cs typeface="Inclusive Sans"/>
                 <a:sym typeface="Inclusive Sans"/>
               </a:rPr>
-              <a:t> </a:t>
+              <a:t> de </a:t>
             </a:r>
             <a:r>
               <a:rPr lang="en-US" sz="2499" b="0" i="0" u="none" strike="noStrike" cap="none" dirty="0" err="1">
@@ -16017,19 +16121,7 @@
                 <a:cs typeface="Inclusive Sans"/>
                 <a:sym typeface="Inclusive Sans"/>
               </a:rPr>
-              <a:t>pornească</a:t>
-            </a:r>
-            <a:r>
-              <a:rPr lang="en-US" sz="2499" b="0" i="0" u="none" strike="noStrike" cap="none" dirty="0">
-                <a:solidFill>
-                  <a:srgbClr val="F9F6FF"/>
-                </a:solidFill>
-                <a:latin typeface="Inclusive Sans"/>
-                <a:ea typeface="Inclusive Sans"/>
-                <a:cs typeface="Inclusive Sans"/>
-                <a:sym typeface="Inclusive Sans"/>
-              </a:rPr>
-              <a:t> (fail-safe)</a:t>
+              <a:t>conditie</a:t>
             </a:r>
             <a:endParaRPr lang="en-US" dirty="0"/>
           </a:p>
@@ -20072,7 +20164,7 @@
                 <a:cs typeface="Inclusive Sans"/>
                 <a:sym typeface="Inclusive Sans"/>
               </a:rPr>
-              <a:t>avansată</a:t>
+              <a:t>sendfile</a:t>
             </a:r>
             <a:r>
               <a:rPr lang="en-US" sz="2400" b="0" i="0" u="none" strike="noStrike" cap="none" dirty="0">
@@ -20084,31 +20176,7 @@
                 <a:cs typeface="Inclusive Sans"/>
                 <a:sym typeface="Inclusive Sans"/>
               </a:rPr>
-              <a:t> </a:t>
-            </a:r>
-            <a:r>
-              <a:rPr lang="en-US" sz="2400" b="0" i="0" u="none" strike="noStrike" cap="none" dirty="0" err="1">
-                <a:solidFill>
-                  <a:srgbClr val="F9F6FF"/>
-                </a:solidFill>
-                <a:latin typeface="Inclusive Sans"/>
-                <a:ea typeface="Inclusive Sans"/>
-                <a:cs typeface="Inclusive Sans"/>
-                <a:sym typeface="Inclusive Sans"/>
-              </a:rPr>
-              <a:t>sendfile</a:t>
-            </a:r>
-            <a:r>
-              <a:rPr lang="en-US" sz="2400" b="0" i="0" u="none" strike="noStrike" cap="none" dirty="0">
-                <a:solidFill>
-                  <a:srgbClr val="F9F6FF"/>
-                </a:solidFill>
-                <a:latin typeface="Inclusive Sans"/>
-                <a:ea typeface="Inclusive Sans"/>
-                <a:cs typeface="Inclusive Sans"/>
-                <a:sym typeface="Inclusive Sans"/>
-              </a:rPr>
-              <a:t>() (zero-copy) </a:t>
+              <a:t>() </a:t>
             </a:r>
             <a:r>
               <a:rPr lang="en-US" sz="2400" b="0" i="0" u="none" strike="noStrike" cap="none" dirty="0" err="1">
@@ -22381,12 +22449,22 @@
             <a:pPr algn="ctr"/>
             <a:r>
               <a:rPr lang="it-IT" sz="2000" dirty="0"/>
-              <a:t>Trimite imaginea prin wrapper-ul nostru nativ (fără #include masiv, doar prin extern linker)</a:t>
+              <a:t>Trimite imaginea prin wrapper-ul nostru nativ</a:t>
             </a:r>
             <a:endParaRPr lang="en-US" sz="2000" dirty="0"/>
           </a:p>
           <a:p>
-            <a:pPr algn="ctr"/>
+            <a:pPr marL="114300" indent="0" algn="ctr">
+              <a:buFont typeface="Inclusive Sans"/>
+              <a:buNone/>
+            </a:pPr>
+            <a:endParaRPr lang="en-US" sz="2000" dirty="0"/>
+          </a:p>
+          <a:p>
+            <a:pPr marL="114300" indent="0" algn="ctr">
+              <a:buFont typeface="Inclusive Sans"/>
+              <a:buNone/>
+            </a:pPr>
             <a:endParaRPr lang="en-US" sz="2000" dirty="0"/>
           </a:p>
           <a:p>
@@ -24936,7 +25014,7 @@
                 <a:cs typeface="Inclusive Sans"/>
                 <a:sym typeface="Inclusive Sans"/>
               </a:rPr>
-              <a:t> local </a:t>
+              <a:t> </a:t>
             </a:r>
             <a:r>
               <a:rPr lang="en-US" sz="2000" b="0" i="0" u="none" strike="noStrike" cap="none" dirty="0" err="1">
@@ -24948,7 +25026,7 @@
                 <a:cs typeface="Inclusive Sans"/>
                 <a:sym typeface="Inclusive Sans"/>
               </a:rPr>
-              <a:t>fișierul</a:t>
+              <a:t>poza</a:t>
             </a:r>
             <a:r>
               <a:rPr lang="en-US" sz="2000" b="0" i="0" u="none" strike="noStrike" cap="none" dirty="0">
@@ -24960,7 +25038,55 @@
                 <a:cs typeface="Inclusive Sans"/>
                 <a:sym typeface="Inclusive Sans"/>
               </a:rPr>
-              <a:t> rezultat_corectat.png. </a:t>
+              <a:t> cu </a:t>
+            </a:r>
+            <a:r>
+              <a:rPr lang="en-US" sz="2000" b="0" i="0" u="none" strike="noStrike" cap="none" dirty="0" err="1">
+                <a:solidFill>
+                  <a:srgbClr val="F9F6FF"/>
+                </a:solidFill>
+                <a:latin typeface="Inclusive Sans"/>
+                <a:ea typeface="Inclusive Sans"/>
+                <a:cs typeface="Inclusive Sans"/>
+                <a:sym typeface="Inclusive Sans"/>
+              </a:rPr>
+              <a:t>numele</a:t>
+            </a:r>
+            <a:r>
+              <a:rPr lang="en-US" sz="2000" b="0" i="0" u="none" strike="noStrike" cap="none" dirty="0">
+                <a:solidFill>
+                  <a:srgbClr val="F9F6FF"/>
+                </a:solidFill>
+                <a:latin typeface="Inclusive Sans"/>
+                <a:ea typeface="Inclusive Sans"/>
+                <a:cs typeface="Inclusive Sans"/>
+                <a:sym typeface="Inclusive Sans"/>
+              </a:rPr>
+              <a:t> </a:t>
+            </a:r>
+            <a:r>
+              <a:rPr lang="en-US" sz="2000" b="0" i="0" u="none" strike="noStrike" cap="none" dirty="0" err="1">
+                <a:solidFill>
+                  <a:srgbClr val="F9F6FF"/>
+                </a:solidFill>
+                <a:latin typeface="Inclusive Sans"/>
+                <a:ea typeface="Inclusive Sans"/>
+                <a:cs typeface="Inclusive Sans"/>
+                <a:sym typeface="Inclusive Sans"/>
+              </a:rPr>
+              <a:t>introdus</a:t>
+            </a:r>
+            <a:r>
+              <a:rPr lang="en-US" sz="2000" b="0" i="0" u="none" strike="noStrike" cap="none" dirty="0">
+                <a:solidFill>
+                  <a:srgbClr val="F9F6FF"/>
+                </a:solidFill>
+                <a:latin typeface="Inclusive Sans"/>
+                <a:ea typeface="Inclusive Sans"/>
+                <a:cs typeface="Inclusive Sans"/>
+                <a:sym typeface="Inclusive Sans"/>
+              </a:rPr>
+              <a:t> de client. </a:t>
             </a:r>
             <a:r>
               <a:rPr lang="en-US" sz="2000" b="0" i="0" u="none" strike="noStrike" cap="none" dirty="0" err="1">

--- a/PrezentarePCD.pptx
+++ b/PrezentarePCD.pptx
@@ -32,14 +32,14 @@
       <p:boldItalic r:id="rId18"/>
     </p:embeddedFont>
     <p:embeddedFont>
-      <p:font typeface="Merriweather Sans" pitchFamily="2" charset="0"/>
+      <p:font typeface="Merriweather Sans" pitchFamily="2" charset="-18"/>
       <p:regular r:id="rId19"/>
       <p:bold r:id="rId20"/>
       <p:italic r:id="rId21"/>
       <p:boldItalic r:id="rId22"/>
     </p:embeddedFont>
     <p:embeddedFont>
-      <p:font typeface="Merriweather Sans Light" pitchFamily="2" charset="0"/>
+      <p:font typeface="Merriweather Sans Light" pitchFamily="2" charset="-18"/>
       <p:regular r:id="rId23"/>
       <p:bold r:id="rId24"/>
       <p:italic r:id="rId25"/>
@@ -10948,6 +10948,18 @@
   <p:clrMapOvr>
     <a:masterClrMapping/>
   </p:clrMapOvr>
+  <mc:AlternateContent xmlns:mc="http://schemas.openxmlformats.org/markup-compatibility/2006" xmlns:p14="http://schemas.microsoft.com/office/powerpoint/2010/main">
+    <mc:Choice Requires="p14">
+      <p:transition spd="slow" p14:dur="1500">
+        <p:split orient="vert"/>
+      </p:transition>
+    </mc:Choice>
+    <mc:Fallback xmlns="">
+      <p:transition spd="slow">
+        <p:split orient="vert"/>
+      </p:transition>
+    </mc:Fallback>
+  </mc:AlternateContent>
 </p:sld>
 </file>
 
@@ -11042,7 +11054,7 @@
         </p:nvGrpSpPr>
         <p:grpSpPr>
           <a:xfrm>
-            <a:off x="2848647" y="2660154"/>
+            <a:off x="5442167" y="2643053"/>
             <a:ext cx="6608045" cy="6806522"/>
             <a:chOff x="0" y="-19050"/>
             <a:chExt cx="1740390" cy="1792664"/>
@@ -11287,7 +11299,7 @@
         </p:nvSpPr>
         <p:spPr>
           <a:xfrm>
-            <a:off x="3297890" y="3532723"/>
+            <a:off x="6022039" y="3557971"/>
             <a:ext cx="5448300" cy="3988784"/>
           </a:xfrm>
           <a:prstGeom prst="rect">
@@ -11813,6 +11825,18 @@
   <p:clrMapOvr>
     <a:masterClrMapping/>
   </p:clrMapOvr>
+  <mc:AlternateContent xmlns:mc="http://schemas.openxmlformats.org/markup-compatibility/2006" xmlns:p15="http://schemas.microsoft.com/office/powerpoint/2012/main">
+    <mc:Choice Requires="p15">
+      <p:transition xmlns:p14="http://schemas.microsoft.com/office/powerpoint/2010/main" spd="slow" p14:dur="2000">
+        <p15:prstTrans prst="wind"/>
+      </p:transition>
+    </mc:Choice>
+    <mc:Fallback xmlns="">
+      <p:transition spd="slow">
+        <p:fade/>
+      </p:transition>
+    </mc:Fallback>
+  </mc:AlternateContent>
 </p:sld>
 </file>
 
@@ -12715,6 +12739,18 @@
   <p:clrMapOvr>
     <a:masterClrMapping/>
   </p:clrMapOvr>
+  <mc:AlternateContent xmlns:mc="http://schemas.openxmlformats.org/markup-compatibility/2006" xmlns:p14="http://schemas.microsoft.com/office/powerpoint/2010/main">
+    <mc:Choice Requires="p14">
+      <p:transition spd="slow" p14:dur="2500">
+        <p:checker/>
+      </p:transition>
+    </mc:Choice>
+    <mc:Fallback xmlns="">
+      <p:transition spd="slow">
+        <p:checker/>
+      </p:transition>
+    </mc:Fallback>
+  </mc:AlternateContent>
 </p:sld>
 </file>
 
@@ -12960,6 +12996,18 @@
   <p:clrMapOvr>
     <a:masterClrMapping/>
   </p:clrMapOvr>
+  <mc:AlternateContent xmlns:mc="http://schemas.openxmlformats.org/markup-compatibility/2006" xmlns:p14="http://schemas.microsoft.com/office/powerpoint/2010/main">
+    <mc:Choice Requires="p14">
+      <p:transition spd="slow" p14:dur="4400">
+        <p14:honeycomb/>
+      </p:transition>
+    </mc:Choice>
+    <mc:Fallback xmlns="">
+      <p:transition spd="slow">
+        <p:fade/>
+      </p:transition>
+    </mc:Fallback>
+  </mc:AlternateContent>
 </p:sld>
 </file>
 
@@ -14245,6 +14293,9 @@
   <p:clrMapOvr>
     <a:masterClrMapping/>
   </p:clrMapOvr>
+  <p:transition spd="med">
+    <p:pull/>
+  </p:transition>
 </p:sld>
 </file>
 
@@ -14745,6 +14796,9 @@
   <p:clrMapOvr>
     <a:masterClrMapping/>
   </p:clrMapOvr>
+  <p:transition spd="slow">
+    <p:cover/>
+  </p:transition>
 </p:sld>
 </file>
 
@@ -15188,6 +15242,18 @@
   <p:clrMapOvr>
     <a:masterClrMapping/>
   </p:clrMapOvr>
+  <mc:AlternateContent xmlns:mc="http://schemas.openxmlformats.org/markup-compatibility/2006" xmlns:p15="http://schemas.microsoft.com/office/powerpoint/2012/main">
+    <mc:Choice Requires="p15">
+      <p:transition xmlns:p14="http://schemas.microsoft.com/office/powerpoint/2010/main" spd="slow" p14:dur="2000">
+        <p15:prstTrans prst="fallOver"/>
+      </p:transition>
+    </mc:Choice>
+    <mc:Fallback xmlns="">
+      <p:transition spd="slow">
+        <p:fade/>
+      </p:transition>
+    </mc:Fallback>
+  </mc:AlternateContent>
 </p:sld>
 </file>
 
@@ -15923,54 +15989,6 @@
                   <a:cs typeface="Inclusive Sans"/>
                   <a:sym typeface="Inclusive Sans"/>
                 </a:rPr>
-                <a:t>Funcția</a:t>
-              </a:r>
-              <a:r>
-                <a:rPr lang="en-US" sz="2600" b="0" i="0" u="none" strike="noStrike" cap="none" dirty="0">
-                  <a:solidFill>
-                    <a:srgbClr val="F9F6FF"/>
-                  </a:solidFill>
-                  <a:latin typeface="Inclusive Sans"/>
-                  <a:ea typeface="Inclusive Sans"/>
-                  <a:cs typeface="Inclusive Sans"/>
-                  <a:sym typeface="Inclusive Sans"/>
-                </a:rPr>
-                <a:t> main() </a:t>
-              </a:r>
-              <a:r>
-                <a:rPr lang="en-US" sz="2600" b="0" i="0" u="none" strike="noStrike" cap="none" dirty="0" err="1">
-                  <a:solidFill>
-                    <a:srgbClr val="F9F6FF"/>
-                  </a:solidFill>
-                  <a:latin typeface="Inclusive Sans"/>
-                  <a:ea typeface="Inclusive Sans"/>
-                  <a:cs typeface="Inclusive Sans"/>
-                  <a:sym typeface="Inclusive Sans"/>
-                </a:rPr>
-                <a:t>și</a:t>
-              </a:r>
-              <a:r>
-                <a:rPr lang="en-US" sz="2600" b="0" i="0" u="none" strike="noStrike" cap="none" dirty="0">
-                  <a:solidFill>
-                    <a:srgbClr val="F9F6FF"/>
-                  </a:solidFill>
-                  <a:latin typeface="Inclusive Sans"/>
-                  <a:ea typeface="Inclusive Sans"/>
-                  <a:cs typeface="Inclusive Sans"/>
-                  <a:sym typeface="Inclusive Sans"/>
-                </a:rPr>
-                <a:t> </a:t>
-              </a:r>
-              <a:r>
-                <a:rPr lang="en-US" sz="2600" b="0" i="0" u="none" strike="noStrike" cap="none" dirty="0" err="1">
-                  <a:solidFill>
-                    <a:srgbClr val="F9F6FF"/>
-                  </a:solidFill>
-                  <a:latin typeface="Inclusive Sans"/>
-                  <a:ea typeface="Inclusive Sans"/>
-                  <a:cs typeface="Inclusive Sans"/>
-                  <a:sym typeface="Inclusive Sans"/>
-                </a:rPr>
                 <a:t>Inițializarea</a:t>
               </a:r>
               <a:endParaRPr lang="en-US" sz="1200" dirty="0"/>
@@ -16664,7 +16682,7 @@
                   <a:schemeClr val="bg1"/>
                 </a:solidFill>
               </a:rPr>
-              <a:t>`: Firul </a:t>
+              <a:t>: Firul </a:t>
             </a:r>
             <a:r>
               <a:rPr lang="ro-RO" sz="2500" dirty="0" err="1">
@@ -16706,6 +16724,18 @@
   <p:clrMapOvr>
     <a:masterClrMapping/>
   </p:clrMapOvr>
+  <mc:AlternateContent xmlns:mc="http://schemas.openxmlformats.org/markup-compatibility/2006" xmlns:p15="http://schemas.microsoft.com/office/powerpoint/2012/main">
+    <mc:Choice Requires="p15">
+      <p:transition xmlns:p14="http://schemas.microsoft.com/office/powerpoint/2010/main" spd="slow" p14:dur="1250">
+        <p15:prstTrans prst="airplane"/>
+      </p:transition>
+    </mc:Choice>
+    <mc:Fallback xmlns="">
+      <p:transition spd="slow">
+        <p:fade/>
+      </p:transition>
+    </mc:Fallback>
+  </mc:AlternateContent>
 </p:sld>
 </file>
 
@@ -19272,6 +19302,18 @@
   <p:clrMapOvr>
     <a:masterClrMapping/>
   </p:clrMapOvr>
+  <mc:AlternateContent xmlns:mc="http://schemas.openxmlformats.org/markup-compatibility/2006" xmlns:p15="http://schemas.microsoft.com/office/powerpoint/2012/main">
+    <mc:Choice Requires="p15">
+      <p:transition xmlns:p14="http://schemas.microsoft.com/office/powerpoint/2010/main" spd="slow" p14:dur="3250">
+        <p15:prstTrans prst="origami"/>
+      </p:transition>
+    </mc:Choice>
+    <mc:Fallback xmlns="">
+      <p:transition spd="slow">
+        <p:fade/>
+      </p:transition>
+    </mc:Fallback>
+  </mc:AlternateContent>
 </p:sld>
 </file>
 
@@ -21143,45 +21185,6 @@
       </p:pic>
       <p:sp>
         <p:nvSpPr>
-          <p:cNvPr id="2" name="CasetăText 1">
-            <a:extLst>
-              <a:ext uri="{FF2B5EF4-FFF2-40B4-BE49-F238E27FC236}">
-                <a16:creationId xmlns:a16="http://schemas.microsoft.com/office/drawing/2014/main" id="{5D8962AD-B9D6-C5D8-8424-1BEFC912D5F6}"/>
-              </a:ext>
-            </a:extLst>
-          </p:cNvPr>
-          <p:cNvSpPr txBox="1"/>
-          <p:nvPr/>
-        </p:nvSpPr>
-        <p:spPr>
-          <a:xfrm>
-            <a:off x="7893150" y="9406324"/>
-            <a:ext cx="2209259" cy="707886"/>
-          </a:xfrm>
-          <a:prstGeom prst="rect">
-            <a:avLst/>
-          </a:prstGeom>
-          <a:noFill/>
-        </p:spPr>
-        <p:txBody>
-          <a:bodyPr wrap="none" rtlCol="0">
-            <a:spAutoFit/>
-          </a:bodyPr>
-          <a:lstStyle/>
-          <a:p>
-            <a:r>
-              <a:rPr lang="ro-RO" sz="4000" dirty="0">
-                <a:solidFill>
-                  <a:schemeClr val="bg1"/>
-                </a:solidFill>
-              </a:rPr>
-              <a:t>Recepția</a:t>
-            </a:r>
-          </a:p>
-        </p:txBody>
-      </p:sp>
-      <p:sp>
-        <p:nvSpPr>
           <p:cNvPr id="3" name="CasetăText 2">
             <a:extLst>
               <a:ext uri="{FF2B5EF4-FFF2-40B4-BE49-F238E27FC236}">
@@ -21448,6 +21451,18 @@
   <p:clrMapOvr>
     <a:masterClrMapping/>
   </p:clrMapOvr>
+  <mc:AlternateContent xmlns:mc="http://schemas.openxmlformats.org/markup-compatibility/2006" xmlns:p15="http://schemas.microsoft.com/office/powerpoint/2012/main">
+    <mc:Choice Requires="p15">
+      <p:transition xmlns:p14="http://schemas.microsoft.com/office/powerpoint/2010/main" spd="slow" p14:dur="2000">
+        <p15:prstTrans prst="crush"/>
+      </p:transition>
+    </mc:Choice>
+    <mc:Fallback xmlns="">
+      <p:transition spd="slow">
+        <p:fade/>
+      </p:transition>
+    </mc:Fallback>
+  </mc:AlternateContent>
 </p:sld>
 </file>
 
@@ -23507,55 +23522,23 @@
           </a:p>
         </p:txBody>
       </p:sp>
-      <p:sp>
-        <p:nvSpPr>
-          <p:cNvPr id="27" name="CasetăText 26">
-            <a:extLst>
-              <a:ext uri="{FF2B5EF4-FFF2-40B4-BE49-F238E27FC236}">
-                <a16:creationId xmlns:a16="http://schemas.microsoft.com/office/drawing/2014/main" id="{0EFBA70C-DA77-158A-2217-726702D7F4B1}"/>
-              </a:ext>
-            </a:extLst>
-          </p:cNvPr>
-          <p:cNvSpPr txBox="1"/>
-          <p:nvPr/>
-        </p:nvSpPr>
-        <p:spPr>
-          <a:xfrm>
-            <a:off x="7462116" y="9406324"/>
-            <a:ext cx="2494594" cy="707886"/>
-          </a:xfrm>
-          <a:prstGeom prst="rect">
-            <a:avLst/>
-          </a:prstGeom>
-          <a:noFill/>
-        </p:spPr>
-        <p:txBody>
-          <a:bodyPr wrap="none" rtlCol="0">
-            <a:spAutoFit/>
-          </a:bodyPr>
-          <a:lstStyle/>
-          <a:p>
-            <a:r>
-              <a:rPr lang="fr-FR" sz="4000" dirty="0" err="1">
-                <a:solidFill>
-                  <a:schemeClr val="bg1"/>
-                </a:solidFill>
-              </a:rPr>
-              <a:t>Evaluarea</a:t>
-            </a:r>
-            <a:endParaRPr lang="fr-FR" sz="4000" dirty="0">
-              <a:solidFill>
-                <a:schemeClr val="bg1"/>
-              </a:solidFill>
-            </a:endParaRPr>
-          </a:p>
-        </p:txBody>
-      </p:sp>
     </p:spTree>
   </p:cSld>
   <p:clrMapOvr>
     <a:masterClrMapping/>
   </p:clrMapOvr>
+  <mc:AlternateContent xmlns:mc="http://schemas.openxmlformats.org/markup-compatibility/2006" xmlns:p15="http://schemas.microsoft.com/office/powerpoint/2012/main">
+    <mc:Choice Requires="p15">
+      <p:transition xmlns:p14="http://schemas.microsoft.com/office/powerpoint/2010/main" spd="slow" p14:dur="2000">
+        <p15:prstTrans prst="fracture"/>
+      </p:transition>
+    </mc:Choice>
+    <mc:Fallback xmlns="">
+      <p:transition spd="slow">
+        <p:fade/>
+      </p:transition>
+    </mc:Fallback>
+  </mc:AlternateContent>
 </p:sld>
 </file>
 
@@ -25559,50 +25542,23 @@
           </a:p>
         </p:txBody>
       </p:sp>
-      <p:sp>
-        <p:nvSpPr>
-          <p:cNvPr id="2" name="CasetăText 1">
-            <a:extLst>
-              <a:ext uri="{FF2B5EF4-FFF2-40B4-BE49-F238E27FC236}">
-                <a16:creationId xmlns:a16="http://schemas.microsoft.com/office/drawing/2014/main" id="{863C8720-14A8-886F-3194-54A544B0D968}"/>
-              </a:ext>
-            </a:extLst>
-          </p:cNvPr>
-          <p:cNvSpPr txBox="1"/>
-          <p:nvPr/>
-        </p:nvSpPr>
-        <p:spPr>
-          <a:xfrm>
-            <a:off x="6371446" y="9260592"/>
-            <a:ext cx="5545108" cy="707886"/>
-          </a:xfrm>
-          <a:prstGeom prst="rect">
-            <a:avLst/>
-          </a:prstGeom>
-          <a:noFill/>
-        </p:spPr>
-        <p:txBody>
-          <a:bodyPr wrap="none" rtlCol="0">
-            <a:spAutoFit/>
-          </a:bodyPr>
-          <a:lstStyle/>
-          <a:p>
-            <a:r>
-              <a:rPr lang="ro-RO" sz="4000" dirty="0">
-                <a:solidFill>
-                  <a:schemeClr val="bg1"/>
-                </a:solidFill>
-              </a:rPr>
-              <a:t>Răspunsul Bidirecțional</a:t>
-            </a:r>
-          </a:p>
-        </p:txBody>
-      </p:sp>
     </p:spTree>
   </p:cSld>
   <p:clrMapOvr>
     <a:masterClrMapping/>
   </p:clrMapOvr>
+  <mc:AlternateContent xmlns:mc="http://schemas.openxmlformats.org/markup-compatibility/2006" xmlns:p14="http://schemas.microsoft.com/office/powerpoint/2010/main">
+    <mc:Choice Requires="p14">
+      <p:transition spd="slow" p14:dur="4000">
+        <p14:vortex dir="r"/>
+      </p:transition>
+    </mc:Choice>
+    <mc:Fallback xmlns="">
+      <p:transition spd="slow">
+        <p:fade/>
+      </p:transition>
+    </mc:Fallback>
+  </mc:AlternateContent>
 </p:sld>
 </file>
 

--- a/PrezentarePCD.pptx
+++ b/PrezentarePCD.pptx
@@ -16115,7 +16115,7 @@
                 <a:cs typeface="Inclusive Sans"/>
                 <a:sym typeface="Inclusive Sans"/>
               </a:rPr>
-              <a:t>variabilele</a:t>
+              <a:t>variabila</a:t>
             </a:r>
             <a:r>
               <a:rPr lang="en-US" sz="2499" b="0" i="0" u="none" strike="noStrike" cap="none" dirty="0">

--- a/PrezentarePCD.pptx
+++ b/PrezentarePCD.pptx
@@ -15830,7 +15830,7 @@
         </p:nvSpPr>
         <p:spPr>
           <a:xfrm>
-            <a:off x="2283456" y="4731104"/>
+            <a:off x="2326879" y="6220946"/>
             <a:ext cx="4949759" cy="1076833"/>
           </a:xfrm>
           <a:prstGeom prst="rect">
@@ -16004,7 +16004,7 @@
         </p:nvSpPr>
         <p:spPr>
           <a:xfrm>
-            <a:off x="2386513" y="6123224"/>
+            <a:off x="2326879" y="4530478"/>
             <a:ext cx="4743643" cy="1076833"/>
           </a:xfrm>
           <a:prstGeom prst="rect">

--- a/PrezentarePCD.pptx
+++ b/PrezentarePCD.pptx
@@ -14273,18 +14273,38 @@
               <a:buNone/>
             </a:pPr>
             <a:r>
-              <a:rPr lang="en-US" sz="3600" b="0" i="0" u="none" strike="noStrike" cap="none" dirty="0">
-                <a:solidFill>
-                  <a:srgbClr val="F9F6FF"/>
-                </a:solidFill>
-                <a:latin typeface="Inclusive Sans"/>
-                <a:ea typeface="Inclusive Sans"/>
-                <a:cs typeface="Inclusive Sans"/>
-                <a:sym typeface="Inclusive Sans"/>
-              </a:rPr>
-              <a:t>Final</a:t>
-            </a:r>
-            <a:endParaRPr dirty="0"/>
+              <a:rPr lang="en-US" sz="3600" dirty="0" err="1">
+                <a:solidFill>
+                  <a:srgbClr val="F9F6FF"/>
+                </a:solidFill>
+                <a:latin typeface="Inclusive Sans"/>
+                <a:ea typeface="Inclusive Sans"/>
+                <a:cs typeface="Inclusive Sans"/>
+                <a:sym typeface="Inclusive Sans"/>
+              </a:rPr>
+              <a:t>Partea</a:t>
+            </a:r>
+            <a:r>
+              <a:rPr lang="en-US" sz="3600" dirty="0">
+                <a:solidFill>
+                  <a:srgbClr val="F9F6FF"/>
+                </a:solidFill>
+                <a:latin typeface="Inclusive Sans"/>
+                <a:ea typeface="Inclusive Sans"/>
+                <a:cs typeface="Inclusive Sans"/>
+                <a:sym typeface="Inclusive Sans"/>
+              </a:rPr>
+              <a:t> de Admin</a:t>
+            </a:r>
+            <a:endParaRPr lang="en-US" sz="3600" b="0" i="0" u="none" strike="noStrike" cap="none" dirty="0">
+              <a:solidFill>
+                <a:srgbClr val="F9F6FF"/>
+              </a:solidFill>
+              <a:latin typeface="Inclusive Sans"/>
+              <a:ea typeface="Inclusive Sans"/>
+              <a:cs typeface="Inclusive Sans"/>
+              <a:sym typeface="Inclusive Sans"/>
+            </a:endParaRPr>
           </a:p>
         </p:txBody>
       </p:sp>
